--- a/assets/art.pptx
+++ b/assets/art.pptx
@@ -5,10 +5,11 @@
     <p:sldMasterId id="2147483648" r:id="rId1"/>
   </p:sldMasterIdLst>
   <p:notesMasterIdLst>
-    <p:notesMasterId r:id="rId3"/>
+    <p:notesMasterId r:id="rId4"/>
   </p:notesMasterIdLst>
   <p:sldIdLst>
     <p:sldId id="256" r:id="rId2"/>
+    <p:sldId id="257" r:id="rId3"/>
   </p:sldIdLst>
   <p:sldSz cx="12192000" cy="6858000"/>
   <p:notesSz cx="6858000" cy="9144000"/>
@@ -107,6 +108,11 @@
       </a:defRPr>
     </a:lvl9pPr>
   </p:defaultTextStyle>
+  <p:extLst>
+    <p:ext uri="{EFAFB233-063F-42B5-8137-9DF3F51BA10A}">
+      <p15:sldGuideLst xmlns:p15="http://schemas.microsoft.com/office/powerpoint/2012/main"/>
+    </p:ext>
+  </p:extLst>
 </p:presentation>
 </file>
 
@@ -4404,10 +4410,1958 @@
           </p:txBody>
         </p:sp>
       </p:grpSp>
+      <p:grpSp>
+        <p:nvGrpSpPr>
+          <p:cNvPr id="15" name="Group 14">
+            <a:extLst>
+              <a:ext uri="{FF2B5EF4-FFF2-40B4-BE49-F238E27FC236}">
+                <a16:creationId xmlns:a16="http://schemas.microsoft.com/office/drawing/2014/main" id="{6A3A07DC-8EE1-518C-930B-140D542F3912}"/>
+              </a:ext>
+            </a:extLst>
+          </p:cNvPr>
+          <p:cNvGrpSpPr/>
+          <p:nvPr/>
+        </p:nvGrpSpPr>
+        <p:grpSpPr>
+          <a:xfrm>
+            <a:off x="3067425" y="3516936"/>
+            <a:ext cx="611502" cy="613661"/>
+            <a:chOff x="2807080" y="3522329"/>
+            <a:chExt cx="611502" cy="613661"/>
+          </a:xfrm>
+        </p:grpSpPr>
+        <p:grpSp>
+          <p:nvGrpSpPr>
+            <p:cNvPr id="2" name="Group 1">
+              <a:extLst>
+                <a:ext uri="{FF2B5EF4-FFF2-40B4-BE49-F238E27FC236}">
+                  <a16:creationId xmlns:a16="http://schemas.microsoft.com/office/drawing/2014/main" id="{68C0BF03-3BF5-2AE8-251E-F87509B2D0C5}"/>
+                </a:ext>
+              </a:extLst>
+            </p:cNvPr>
+            <p:cNvGrpSpPr/>
+            <p:nvPr/>
+          </p:nvGrpSpPr>
+          <p:grpSpPr>
+            <a:xfrm>
+              <a:off x="2857193" y="3572197"/>
+              <a:ext cx="511276" cy="563793"/>
+              <a:chOff x="3443749" y="1809752"/>
+              <a:chExt cx="511276" cy="563793"/>
+            </a:xfrm>
+          </p:grpSpPr>
+          <p:sp>
+            <p:nvSpPr>
+              <p:cNvPr id="3" name="Oval 2">
+                <a:extLst>
+                  <a:ext uri="{FF2B5EF4-FFF2-40B4-BE49-F238E27FC236}">
+                    <a16:creationId xmlns:a16="http://schemas.microsoft.com/office/drawing/2014/main" id="{53A7147E-2E1E-46FB-3EFF-C14BDF9C1F05}"/>
+                  </a:ext>
+                </a:extLst>
+              </p:cNvPr>
+              <p:cNvSpPr/>
+              <p:nvPr/>
+            </p:nvSpPr>
+            <p:spPr>
+              <a:xfrm>
+                <a:off x="3443749" y="1809752"/>
+                <a:ext cx="511276" cy="511276"/>
+              </a:xfrm>
+              <a:prstGeom prst="ellipse">
+                <a:avLst/>
+              </a:prstGeom>
+              <a:solidFill>
+                <a:srgbClr val="000000"/>
+              </a:solidFill>
+              <a:ln w="57150">
+                <a:solidFill>
+                  <a:schemeClr val="tx1"/>
+                </a:solidFill>
+              </a:ln>
+            </p:spPr>
+            <p:style>
+              <a:lnRef idx="2">
+                <a:schemeClr val="accent1">
+                  <a:shade val="15000"/>
+                </a:schemeClr>
+              </a:lnRef>
+              <a:fillRef idx="1">
+                <a:schemeClr val="accent1"/>
+              </a:fillRef>
+              <a:effectRef idx="0">
+                <a:schemeClr val="accent1"/>
+              </a:effectRef>
+              <a:fontRef idx="minor">
+                <a:schemeClr val="lt1"/>
+              </a:fontRef>
+            </p:style>
+            <p:txBody>
+              <a:bodyPr rtlCol="0" anchor="ctr"/>
+              <a:lstStyle/>
+              <a:p>
+                <a:pPr algn="ctr"/>
+                <a:endParaRPr lang="en-GB"/>
+              </a:p>
+            </p:txBody>
+          </p:sp>
+          <p:sp>
+            <p:nvSpPr>
+              <p:cNvPr id="8" name="Moon 7">
+                <a:extLst>
+                  <a:ext uri="{FF2B5EF4-FFF2-40B4-BE49-F238E27FC236}">
+                    <a16:creationId xmlns:a16="http://schemas.microsoft.com/office/drawing/2014/main" id="{F3AA9187-09B4-7316-7726-FF06576CFBFF}"/>
+                  </a:ext>
+                </a:extLst>
+              </p:cNvPr>
+              <p:cNvSpPr/>
+              <p:nvPr/>
+            </p:nvSpPr>
+            <p:spPr>
+              <a:xfrm rot="18900000">
+                <a:off x="3494655" y="1906513"/>
+                <a:ext cx="256022" cy="467032"/>
+              </a:xfrm>
+              <a:prstGeom prst="moon">
+                <a:avLst>
+                  <a:gd name="adj" fmla="val 28954"/>
+                </a:avLst>
+              </a:prstGeom>
+              <a:solidFill>
+                <a:srgbClr val="1D2B53"/>
+              </a:solidFill>
+              <a:ln>
+                <a:noFill/>
+              </a:ln>
+            </p:spPr>
+            <p:style>
+              <a:lnRef idx="2">
+                <a:schemeClr val="accent1">
+                  <a:shade val="15000"/>
+                </a:schemeClr>
+              </a:lnRef>
+              <a:fillRef idx="1">
+                <a:schemeClr val="accent1"/>
+              </a:fillRef>
+              <a:effectRef idx="0">
+                <a:schemeClr val="accent1"/>
+              </a:effectRef>
+              <a:fontRef idx="minor">
+                <a:schemeClr val="lt1"/>
+              </a:fontRef>
+            </p:style>
+            <p:txBody>
+              <a:bodyPr rtlCol="0" anchor="ctr"/>
+              <a:lstStyle/>
+              <a:p>
+                <a:pPr algn="ctr"/>
+                <a:endParaRPr lang="en-GB" dirty="0"/>
+              </a:p>
+            </p:txBody>
+          </p:sp>
+          <p:sp>
+            <p:nvSpPr>
+              <p:cNvPr id="12" name="Oval 11">
+                <a:extLst>
+                  <a:ext uri="{FF2B5EF4-FFF2-40B4-BE49-F238E27FC236}">
+                    <a16:creationId xmlns:a16="http://schemas.microsoft.com/office/drawing/2014/main" id="{B49498C8-F1EA-60C8-8E6A-A8D190594897}"/>
+                  </a:ext>
+                </a:extLst>
+              </p:cNvPr>
+              <p:cNvSpPr/>
+              <p:nvPr/>
+            </p:nvSpPr>
+            <p:spPr>
+              <a:xfrm>
+                <a:off x="3443749" y="1809752"/>
+                <a:ext cx="511276" cy="511276"/>
+              </a:xfrm>
+              <a:prstGeom prst="ellipse">
+                <a:avLst/>
+              </a:prstGeom>
+              <a:noFill/>
+              <a:ln w="57150">
+                <a:solidFill>
+                  <a:schemeClr val="tx1"/>
+                </a:solidFill>
+              </a:ln>
+            </p:spPr>
+            <p:style>
+              <a:lnRef idx="2">
+                <a:schemeClr val="accent1">
+                  <a:shade val="15000"/>
+                </a:schemeClr>
+              </a:lnRef>
+              <a:fillRef idx="1">
+                <a:schemeClr val="accent1"/>
+              </a:fillRef>
+              <a:effectRef idx="0">
+                <a:schemeClr val="accent1"/>
+              </a:effectRef>
+              <a:fontRef idx="minor">
+                <a:schemeClr val="lt1"/>
+              </a:fontRef>
+            </p:style>
+            <p:txBody>
+              <a:bodyPr rtlCol="0" anchor="ctr"/>
+              <a:lstStyle/>
+              <a:p>
+                <a:pPr algn="ctr"/>
+                <a:endParaRPr lang="en-GB" dirty="0"/>
+              </a:p>
+            </p:txBody>
+          </p:sp>
+        </p:grpSp>
+        <p:sp>
+          <p:nvSpPr>
+            <p:cNvPr id="14" name="Oval 13">
+              <a:extLst>
+                <a:ext uri="{FF2B5EF4-FFF2-40B4-BE49-F238E27FC236}">
+                  <a16:creationId xmlns:a16="http://schemas.microsoft.com/office/drawing/2014/main" id="{73A88AB1-BB2A-DFE1-7BB1-8A0A992FAE66}"/>
+                </a:ext>
+              </a:extLst>
+            </p:cNvPr>
+            <p:cNvSpPr/>
+            <p:nvPr/>
+          </p:nvSpPr>
+          <p:spPr>
+            <a:xfrm>
+              <a:off x="2807080" y="3522329"/>
+              <a:ext cx="611502" cy="611502"/>
+            </a:xfrm>
+            <a:prstGeom prst="ellipse">
+              <a:avLst/>
+            </a:prstGeom>
+            <a:noFill/>
+            <a:ln w="57150">
+              <a:solidFill>
+                <a:srgbClr val="FFF1E8"/>
+              </a:solidFill>
+            </a:ln>
+          </p:spPr>
+          <p:style>
+            <a:lnRef idx="2">
+              <a:schemeClr val="accent1">
+                <a:shade val="15000"/>
+              </a:schemeClr>
+            </a:lnRef>
+            <a:fillRef idx="1">
+              <a:schemeClr val="accent1"/>
+            </a:fillRef>
+            <a:effectRef idx="0">
+              <a:schemeClr val="accent1"/>
+            </a:effectRef>
+            <a:fontRef idx="minor">
+              <a:schemeClr val="lt1"/>
+            </a:fontRef>
+          </p:style>
+          <p:txBody>
+            <a:bodyPr rtlCol="0" anchor="ctr"/>
+            <a:lstStyle/>
+            <a:p>
+              <a:pPr algn="ctr"/>
+              <a:endParaRPr lang="en-GB" dirty="0"/>
+            </a:p>
+          </p:txBody>
+        </p:sp>
+      </p:grpSp>
+      <p:sp>
+        <p:nvSpPr>
+          <p:cNvPr id="18" name="Arrow: Up 17">
+            <a:extLst>
+              <a:ext uri="{FF2B5EF4-FFF2-40B4-BE49-F238E27FC236}">
+                <a16:creationId xmlns:a16="http://schemas.microsoft.com/office/drawing/2014/main" id="{075B985A-8927-1BA6-0E79-E682695CBD40}"/>
+              </a:ext>
+            </a:extLst>
+          </p:cNvPr>
+          <p:cNvSpPr/>
+          <p:nvPr/>
+        </p:nvSpPr>
+        <p:spPr>
+          <a:xfrm rot="19362859">
+            <a:off x="4171873" y="3356226"/>
+            <a:ext cx="290155" cy="909050"/>
+          </a:xfrm>
+          <a:prstGeom prst="upArrow">
+            <a:avLst>
+              <a:gd name="adj1" fmla="val 50000"/>
+              <a:gd name="adj2" fmla="val 80978"/>
+            </a:avLst>
+          </a:prstGeom>
+          <a:solidFill>
+            <a:srgbClr val="FFF1E8"/>
+          </a:solidFill>
+          <a:ln w="57150">
+            <a:solidFill>
+              <a:schemeClr val="tx1"/>
+            </a:solidFill>
+          </a:ln>
+        </p:spPr>
+        <p:style>
+          <a:lnRef idx="2">
+            <a:schemeClr val="accent1">
+              <a:shade val="15000"/>
+            </a:schemeClr>
+          </a:lnRef>
+          <a:fillRef idx="1">
+            <a:schemeClr val="accent1"/>
+          </a:fillRef>
+          <a:effectRef idx="0">
+            <a:schemeClr val="accent1"/>
+          </a:effectRef>
+          <a:fontRef idx="minor">
+            <a:schemeClr val="lt1"/>
+          </a:fontRef>
+        </p:style>
+        <p:txBody>
+          <a:bodyPr rtlCol="0" anchor="ctr"/>
+          <a:lstStyle/>
+          <a:p>
+            <a:pPr algn="ctr"/>
+            <a:endParaRPr lang="en-GB"/>
+          </a:p>
+        </p:txBody>
+      </p:sp>
+      <p:grpSp>
+        <p:nvGrpSpPr>
+          <p:cNvPr id="19" name="Group 18">
+            <a:extLst>
+              <a:ext uri="{FF2B5EF4-FFF2-40B4-BE49-F238E27FC236}">
+                <a16:creationId xmlns:a16="http://schemas.microsoft.com/office/drawing/2014/main" id="{1A8ACE24-34B8-700A-69B4-ABAB95603C36}"/>
+              </a:ext>
+            </a:extLst>
+          </p:cNvPr>
+          <p:cNvGrpSpPr/>
+          <p:nvPr/>
+        </p:nvGrpSpPr>
+        <p:grpSpPr>
+          <a:xfrm>
+            <a:off x="3926176" y="3326296"/>
+            <a:ext cx="139482" cy="139482"/>
+            <a:chOff x="3443749" y="1809752"/>
+            <a:chExt cx="511276" cy="511276"/>
+          </a:xfrm>
+        </p:grpSpPr>
+        <p:sp>
+          <p:nvSpPr>
+            <p:cNvPr id="20" name="Oval 19">
+              <a:extLst>
+                <a:ext uri="{FF2B5EF4-FFF2-40B4-BE49-F238E27FC236}">
+                  <a16:creationId xmlns:a16="http://schemas.microsoft.com/office/drawing/2014/main" id="{B0FAD51E-A2EF-9B71-77B4-773FEEEF7F29}"/>
+                </a:ext>
+              </a:extLst>
+            </p:cNvPr>
+            <p:cNvSpPr/>
+            <p:nvPr/>
+          </p:nvSpPr>
+          <p:spPr>
+            <a:xfrm>
+              <a:off x="3443749" y="1809752"/>
+              <a:ext cx="511276" cy="511276"/>
+            </a:xfrm>
+            <a:prstGeom prst="ellipse">
+              <a:avLst/>
+            </a:prstGeom>
+            <a:solidFill>
+              <a:srgbClr val="FFF1E8"/>
+            </a:solidFill>
+            <a:ln w="57150">
+              <a:solidFill>
+                <a:schemeClr val="tx1"/>
+              </a:solidFill>
+            </a:ln>
+          </p:spPr>
+          <p:style>
+            <a:lnRef idx="2">
+              <a:schemeClr val="accent1">
+                <a:shade val="15000"/>
+              </a:schemeClr>
+            </a:lnRef>
+            <a:fillRef idx="1">
+              <a:schemeClr val="accent1"/>
+            </a:fillRef>
+            <a:effectRef idx="0">
+              <a:schemeClr val="accent1"/>
+            </a:effectRef>
+            <a:fontRef idx="minor">
+              <a:schemeClr val="lt1"/>
+            </a:fontRef>
+          </p:style>
+          <p:txBody>
+            <a:bodyPr rtlCol="0" anchor="ctr"/>
+            <a:lstStyle/>
+            <a:p>
+              <a:pPr algn="ctr"/>
+              <a:endParaRPr lang="en-GB"/>
+            </a:p>
+          </p:txBody>
+        </p:sp>
+        <p:sp>
+          <p:nvSpPr>
+            <p:cNvPr id="21" name="Oval 20">
+              <a:extLst>
+                <a:ext uri="{FF2B5EF4-FFF2-40B4-BE49-F238E27FC236}">
+                  <a16:creationId xmlns:a16="http://schemas.microsoft.com/office/drawing/2014/main" id="{BC43062B-65AD-0BF8-23B3-FDC0DCD41E32}"/>
+                </a:ext>
+              </a:extLst>
+            </p:cNvPr>
+            <p:cNvSpPr/>
+            <p:nvPr/>
+          </p:nvSpPr>
+          <p:spPr>
+            <a:xfrm>
+              <a:off x="3443749" y="1809752"/>
+              <a:ext cx="511276" cy="511276"/>
+            </a:xfrm>
+            <a:prstGeom prst="ellipse">
+              <a:avLst/>
+            </a:prstGeom>
+            <a:noFill/>
+            <a:ln w="57150">
+              <a:solidFill>
+                <a:schemeClr val="tx1"/>
+              </a:solidFill>
+            </a:ln>
+          </p:spPr>
+          <p:style>
+            <a:lnRef idx="2">
+              <a:schemeClr val="accent1">
+                <a:shade val="15000"/>
+              </a:schemeClr>
+            </a:lnRef>
+            <a:fillRef idx="1">
+              <a:schemeClr val="accent1"/>
+            </a:fillRef>
+            <a:effectRef idx="0">
+              <a:schemeClr val="accent1"/>
+            </a:effectRef>
+            <a:fontRef idx="minor">
+              <a:schemeClr val="lt1"/>
+            </a:fontRef>
+          </p:style>
+          <p:txBody>
+            <a:bodyPr rtlCol="0" anchor="ctr"/>
+            <a:lstStyle/>
+            <a:p>
+              <a:pPr algn="ctr"/>
+              <a:endParaRPr lang="en-GB" dirty="0"/>
+            </a:p>
+          </p:txBody>
+        </p:sp>
+      </p:grpSp>
+      <p:grpSp>
+        <p:nvGrpSpPr>
+          <p:cNvPr id="27" name="Group 26">
+            <a:extLst>
+              <a:ext uri="{FF2B5EF4-FFF2-40B4-BE49-F238E27FC236}">
+                <a16:creationId xmlns:a16="http://schemas.microsoft.com/office/drawing/2014/main" id="{20C281C1-FA2C-54C9-B734-623CD6E9F567}"/>
+              </a:ext>
+            </a:extLst>
+          </p:cNvPr>
+          <p:cNvGrpSpPr/>
+          <p:nvPr/>
+        </p:nvGrpSpPr>
+        <p:grpSpPr>
+          <a:xfrm>
+            <a:off x="7349058" y="5404280"/>
+            <a:ext cx="519145" cy="512370"/>
+            <a:chOff x="2268864" y="1699266"/>
+            <a:chExt cx="519145" cy="512370"/>
+          </a:xfrm>
+        </p:grpSpPr>
+        <p:grpSp>
+          <p:nvGrpSpPr>
+            <p:cNvPr id="28" name="Group 27">
+              <a:extLst>
+                <a:ext uri="{FF2B5EF4-FFF2-40B4-BE49-F238E27FC236}">
+                  <a16:creationId xmlns:a16="http://schemas.microsoft.com/office/drawing/2014/main" id="{FE7614B4-B398-A29F-5D43-437F98DD14C1}"/>
+                </a:ext>
+              </a:extLst>
+            </p:cNvPr>
+            <p:cNvGrpSpPr/>
+            <p:nvPr/>
+          </p:nvGrpSpPr>
+          <p:grpSpPr>
+            <a:xfrm>
+              <a:off x="2268864" y="1699266"/>
+              <a:ext cx="500949" cy="220980"/>
+              <a:chOff x="2268864" y="1699266"/>
+              <a:chExt cx="500949" cy="220980"/>
+            </a:xfrm>
+            <a:solidFill>
+              <a:srgbClr val="FFF1E8"/>
+            </a:solidFill>
+          </p:grpSpPr>
+          <p:sp>
+            <p:nvSpPr>
+              <p:cNvPr id="32" name="Isosceles Triangle 31">
+                <a:extLst>
+                  <a:ext uri="{FF2B5EF4-FFF2-40B4-BE49-F238E27FC236}">
+                    <a16:creationId xmlns:a16="http://schemas.microsoft.com/office/drawing/2014/main" id="{BBF34C38-6D14-F406-681D-3D70C148276F}"/>
+                  </a:ext>
+                </a:extLst>
+              </p:cNvPr>
+              <p:cNvSpPr/>
+              <p:nvPr/>
+            </p:nvSpPr>
+            <p:spPr>
+              <a:xfrm rot="8100000">
+                <a:off x="2268864" y="1714503"/>
+                <a:ext cx="220980" cy="190500"/>
+              </a:xfrm>
+              <a:prstGeom prst="triangle">
+                <a:avLst/>
+              </a:prstGeom>
+              <a:grpFill/>
+              <a:ln w="57150">
+                <a:solidFill>
+                  <a:schemeClr val="tx1"/>
+                </a:solidFill>
+              </a:ln>
+            </p:spPr>
+            <p:style>
+              <a:lnRef idx="2">
+                <a:schemeClr val="accent1">
+                  <a:shade val="15000"/>
+                </a:schemeClr>
+              </a:lnRef>
+              <a:fillRef idx="1">
+                <a:schemeClr val="accent1"/>
+              </a:fillRef>
+              <a:effectRef idx="0">
+                <a:schemeClr val="accent1"/>
+              </a:effectRef>
+              <a:fontRef idx="minor">
+                <a:schemeClr val="lt1"/>
+              </a:fontRef>
+            </p:style>
+            <p:txBody>
+              <a:bodyPr rtlCol="0" anchor="ctr"/>
+              <a:lstStyle/>
+              <a:p>
+                <a:pPr algn="ctr"/>
+                <a:endParaRPr lang="en-GB"/>
+              </a:p>
+            </p:txBody>
+          </p:sp>
+          <p:sp>
+            <p:nvSpPr>
+              <p:cNvPr id="33" name="Isosceles Triangle 32">
+                <a:extLst>
+                  <a:ext uri="{FF2B5EF4-FFF2-40B4-BE49-F238E27FC236}">
+                    <a16:creationId xmlns:a16="http://schemas.microsoft.com/office/drawing/2014/main" id="{F11E1511-70CB-CF11-60D1-C7BBD2555A43}"/>
+                  </a:ext>
+                </a:extLst>
+              </p:cNvPr>
+              <p:cNvSpPr/>
+              <p:nvPr/>
+            </p:nvSpPr>
+            <p:spPr>
+              <a:xfrm rot="13500000">
+                <a:off x="2564073" y="1714506"/>
+                <a:ext cx="220980" cy="190500"/>
+              </a:xfrm>
+              <a:prstGeom prst="triangle">
+                <a:avLst/>
+              </a:prstGeom>
+              <a:grpFill/>
+              <a:ln w="57150">
+                <a:solidFill>
+                  <a:schemeClr val="tx1"/>
+                </a:solidFill>
+              </a:ln>
+            </p:spPr>
+            <p:style>
+              <a:lnRef idx="2">
+                <a:schemeClr val="accent1">
+                  <a:shade val="15000"/>
+                </a:schemeClr>
+              </a:lnRef>
+              <a:fillRef idx="1">
+                <a:schemeClr val="accent1"/>
+              </a:fillRef>
+              <a:effectRef idx="0">
+                <a:schemeClr val="accent1"/>
+              </a:effectRef>
+              <a:fontRef idx="minor">
+                <a:schemeClr val="lt1"/>
+              </a:fontRef>
+            </p:style>
+            <p:txBody>
+              <a:bodyPr rtlCol="0" anchor="ctr"/>
+              <a:lstStyle/>
+              <a:p>
+                <a:pPr algn="ctr"/>
+                <a:endParaRPr lang="en-GB"/>
+              </a:p>
+            </p:txBody>
+          </p:sp>
+        </p:grpSp>
+        <p:grpSp>
+          <p:nvGrpSpPr>
+            <p:cNvPr id="29" name="Group 28">
+              <a:extLst>
+                <a:ext uri="{FF2B5EF4-FFF2-40B4-BE49-F238E27FC236}">
+                  <a16:creationId xmlns:a16="http://schemas.microsoft.com/office/drawing/2014/main" id="{D4162CDD-353F-8AC7-447B-6A3BEA778D39}"/>
+                </a:ext>
+              </a:extLst>
+            </p:cNvPr>
+            <p:cNvGrpSpPr/>
+            <p:nvPr/>
+          </p:nvGrpSpPr>
+          <p:grpSpPr>
+            <a:xfrm rot="10800000">
+              <a:off x="2287060" y="1990656"/>
+              <a:ext cx="500949" cy="220980"/>
+              <a:chOff x="2421264" y="1851666"/>
+              <a:chExt cx="500949" cy="220980"/>
+            </a:xfrm>
+            <a:solidFill>
+              <a:srgbClr val="FFF1E8"/>
+            </a:solidFill>
+          </p:grpSpPr>
+          <p:sp>
+            <p:nvSpPr>
+              <p:cNvPr id="30" name="Isosceles Triangle 29">
+                <a:extLst>
+                  <a:ext uri="{FF2B5EF4-FFF2-40B4-BE49-F238E27FC236}">
+                    <a16:creationId xmlns:a16="http://schemas.microsoft.com/office/drawing/2014/main" id="{D6F85E05-12EE-0FFC-93C0-113551A6D990}"/>
+                  </a:ext>
+                </a:extLst>
+              </p:cNvPr>
+              <p:cNvSpPr/>
+              <p:nvPr/>
+            </p:nvSpPr>
+            <p:spPr>
+              <a:xfrm rot="8100000">
+                <a:off x="2421264" y="1866903"/>
+                <a:ext cx="220980" cy="190500"/>
+              </a:xfrm>
+              <a:prstGeom prst="triangle">
+                <a:avLst/>
+              </a:prstGeom>
+              <a:grpFill/>
+              <a:ln w="57150">
+                <a:solidFill>
+                  <a:schemeClr val="tx1"/>
+                </a:solidFill>
+              </a:ln>
+            </p:spPr>
+            <p:style>
+              <a:lnRef idx="2">
+                <a:schemeClr val="accent1">
+                  <a:shade val="15000"/>
+                </a:schemeClr>
+              </a:lnRef>
+              <a:fillRef idx="1">
+                <a:schemeClr val="accent1"/>
+              </a:fillRef>
+              <a:effectRef idx="0">
+                <a:schemeClr val="accent1"/>
+              </a:effectRef>
+              <a:fontRef idx="minor">
+                <a:schemeClr val="lt1"/>
+              </a:fontRef>
+            </p:style>
+            <p:txBody>
+              <a:bodyPr rtlCol="0" anchor="ctr"/>
+              <a:lstStyle/>
+              <a:p>
+                <a:pPr algn="ctr"/>
+                <a:endParaRPr lang="en-GB"/>
+              </a:p>
+            </p:txBody>
+          </p:sp>
+          <p:sp>
+            <p:nvSpPr>
+              <p:cNvPr id="31" name="Isosceles Triangle 30">
+                <a:extLst>
+                  <a:ext uri="{FF2B5EF4-FFF2-40B4-BE49-F238E27FC236}">
+                    <a16:creationId xmlns:a16="http://schemas.microsoft.com/office/drawing/2014/main" id="{95297EA3-7C5C-9F01-8C34-2A66DBED7C3F}"/>
+                  </a:ext>
+                </a:extLst>
+              </p:cNvPr>
+              <p:cNvSpPr/>
+              <p:nvPr/>
+            </p:nvSpPr>
+            <p:spPr>
+              <a:xfrm rot="13500000">
+                <a:off x="2716473" y="1866906"/>
+                <a:ext cx="220980" cy="190500"/>
+              </a:xfrm>
+              <a:prstGeom prst="triangle">
+                <a:avLst/>
+              </a:prstGeom>
+              <a:grpFill/>
+              <a:ln w="57150">
+                <a:solidFill>
+                  <a:schemeClr val="tx1"/>
+                </a:solidFill>
+              </a:ln>
+            </p:spPr>
+            <p:style>
+              <a:lnRef idx="2">
+                <a:schemeClr val="accent1">
+                  <a:shade val="15000"/>
+                </a:schemeClr>
+              </a:lnRef>
+              <a:fillRef idx="1">
+                <a:schemeClr val="accent1"/>
+              </a:fillRef>
+              <a:effectRef idx="0">
+                <a:schemeClr val="accent1"/>
+              </a:effectRef>
+              <a:fontRef idx="minor">
+                <a:schemeClr val="lt1"/>
+              </a:fontRef>
+            </p:style>
+            <p:txBody>
+              <a:bodyPr rtlCol="0" anchor="ctr"/>
+              <a:lstStyle/>
+              <a:p>
+                <a:pPr algn="ctr"/>
+                <a:endParaRPr lang="en-GB"/>
+              </a:p>
+            </p:txBody>
+          </p:sp>
+        </p:grpSp>
+      </p:grpSp>
+      <p:pic>
+        <p:nvPicPr>
+          <p:cNvPr id="41" name="Picture 40">
+            <a:extLst>
+              <a:ext uri="{FF2B5EF4-FFF2-40B4-BE49-F238E27FC236}">
+                <a16:creationId xmlns:a16="http://schemas.microsoft.com/office/drawing/2014/main" id="{37F40636-8AB3-7025-C732-330B3984C627}"/>
+              </a:ext>
+            </a:extLst>
+          </p:cNvPr>
+          <p:cNvPicPr>
+            <a:picLocks noChangeAspect="1"/>
+          </p:cNvPicPr>
+          <p:nvPr/>
+        </p:nvPicPr>
+        <p:blipFill>
+          <a:blip r:embed="rId4">
+            <a:extLst>
+              <a:ext uri="{28A0092B-C50C-407E-A947-70E740481C1C}">
+                <a14:useLocalDpi xmlns:a14="http://schemas.microsoft.com/office/drawing/2010/main" val="0"/>
+              </a:ext>
+            </a:extLst>
+          </a:blip>
+          <a:stretch>
+            <a:fillRect/>
+          </a:stretch>
+        </p:blipFill>
+        <p:spPr>
+          <a:xfrm>
+            <a:off x="1991955" y="4668688"/>
+            <a:ext cx="1219200" cy="1219200"/>
+          </a:xfrm>
+          <a:prstGeom prst="rect">
+            <a:avLst/>
+          </a:prstGeom>
+        </p:spPr>
+      </p:pic>
+      <p:grpSp>
+        <p:nvGrpSpPr>
+          <p:cNvPr id="59" name="Group 58">
+            <a:extLst>
+              <a:ext uri="{FF2B5EF4-FFF2-40B4-BE49-F238E27FC236}">
+                <a16:creationId xmlns:a16="http://schemas.microsoft.com/office/drawing/2014/main" id="{4FB6F94B-CE3A-6EAD-970C-AD0ACCE6A9FE}"/>
+              </a:ext>
+            </a:extLst>
+          </p:cNvPr>
+          <p:cNvGrpSpPr/>
+          <p:nvPr/>
+        </p:nvGrpSpPr>
+        <p:grpSpPr>
+          <a:xfrm>
+            <a:off x="3009997" y="5195207"/>
+            <a:ext cx="239183" cy="239183"/>
+            <a:chOff x="2780471" y="4821161"/>
+            <a:chExt cx="239183" cy="239183"/>
+          </a:xfrm>
+        </p:grpSpPr>
+        <p:sp>
+          <p:nvSpPr>
+            <p:cNvPr id="42" name="Oval 41">
+              <a:extLst>
+                <a:ext uri="{FF2B5EF4-FFF2-40B4-BE49-F238E27FC236}">
+                  <a16:creationId xmlns:a16="http://schemas.microsoft.com/office/drawing/2014/main" id="{1BFA2FDB-1F0A-3B4D-CCA1-4502DBCF8A99}"/>
+                </a:ext>
+              </a:extLst>
+            </p:cNvPr>
+            <p:cNvSpPr/>
+            <p:nvPr/>
+          </p:nvSpPr>
+          <p:spPr>
+            <a:xfrm>
+              <a:off x="2780471" y="4821161"/>
+              <a:ext cx="239183" cy="239183"/>
+            </a:xfrm>
+            <a:prstGeom prst="ellipse">
+              <a:avLst/>
+            </a:prstGeom>
+            <a:solidFill>
+              <a:srgbClr val="FFCCAA"/>
+            </a:solidFill>
+            <a:ln w="57150">
+              <a:noFill/>
+            </a:ln>
+          </p:spPr>
+          <p:style>
+            <a:lnRef idx="2">
+              <a:schemeClr val="accent1">
+                <a:shade val="15000"/>
+              </a:schemeClr>
+            </a:lnRef>
+            <a:fillRef idx="1">
+              <a:schemeClr val="accent1"/>
+            </a:fillRef>
+            <a:effectRef idx="0">
+              <a:schemeClr val="accent1"/>
+            </a:effectRef>
+            <a:fontRef idx="minor">
+              <a:schemeClr val="lt1"/>
+            </a:fontRef>
+          </p:style>
+          <p:txBody>
+            <a:bodyPr rtlCol="0" anchor="ctr"/>
+            <a:lstStyle/>
+            <a:p>
+              <a:pPr algn="ctr"/>
+              <a:endParaRPr lang="en-GB"/>
+            </a:p>
+          </p:txBody>
+        </p:sp>
+        <p:sp>
+          <p:nvSpPr>
+            <p:cNvPr id="37" name="Oval 36">
+              <a:extLst>
+                <a:ext uri="{FF2B5EF4-FFF2-40B4-BE49-F238E27FC236}">
+                  <a16:creationId xmlns:a16="http://schemas.microsoft.com/office/drawing/2014/main" id="{FD0A72E1-6B0B-D573-94BD-45F921E4813D}"/>
+                </a:ext>
+              </a:extLst>
+            </p:cNvPr>
+            <p:cNvSpPr/>
+            <p:nvPr/>
+          </p:nvSpPr>
+          <p:spPr>
+            <a:xfrm>
+              <a:off x="2810579" y="4851269"/>
+              <a:ext cx="178965" cy="178965"/>
+            </a:xfrm>
+            <a:prstGeom prst="ellipse">
+              <a:avLst/>
+            </a:prstGeom>
+            <a:solidFill>
+              <a:srgbClr val="AB5236"/>
+            </a:solidFill>
+            <a:ln w="57150">
+              <a:noFill/>
+            </a:ln>
+          </p:spPr>
+          <p:style>
+            <a:lnRef idx="2">
+              <a:schemeClr val="accent1">
+                <a:shade val="15000"/>
+              </a:schemeClr>
+            </a:lnRef>
+            <a:fillRef idx="1">
+              <a:schemeClr val="accent1"/>
+            </a:fillRef>
+            <a:effectRef idx="0">
+              <a:schemeClr val="accent1"/>
+            </a:effectRef>
+            <a:fontRef idx="minor">
+              <a:schemeClr val="lt1"/>
+            </a:fontRef>
+          </p:style>
+          <p:txBody>
+            <a:bodyPr rtlCol="0" anchor="ctr"/>
+            <a:lstStyle/>
+            <a:p>
+              <a:pPr algn="ctr"/>
+              <a:endParaRPr lang="en-GB"/>
+            </a:p>
+          </p:txBody>
+        </p:sp>
+      </p:grpSp>
+      <p:pic>
+        <p:nvPicPr>
+          <p:cNvPr id="45" name="Picture 44">
+            <a:extLst>
+              <a:ext uri="{FF2B5EF4-FFF2-40B4-BE49-F238E27FC236}">
+                <a16:creationId xmlns:a16="http://schemas.microsoft.com/office/drawing/2014/main" id="{5D9DBE48-D800-79E2-F9FC-5170C95121B4}"/>
+              </a:ext>
+            </a:extLst>
+          </p:cNvPr>
+          <p:cNvPicPr>
+            <a:picLocks noChangeAspect="1"/>
+          </p:cNvPicPr>
+          <p:nvPr/>
+        </p:nvPicPr>
+        <p:blipFill>
+          <a:blip r:embed="rId5"/>
+          <a:stretch>
+            <a:fillRect/>
+          </a:stretch>
+        </p:blipFill>
+        <p:spPr>
+          <a:xfrm>
+            <a:off x="4182780" y="5060289"/>
+            <a:ext cx="2628900" cy="1590675"/>
+          </a:xfrm>
+          <a:prstGeom prst="rect">
+            <a:avLst/>
+          </a:prstGeom>
+        </p:spPr>
+      </p:pic>
+      <p:sp>
+        <p:nvSpPr>
+          <p:cNvPr id="50" name="Oval 49">
+            <a:extLst>
+              <a:ext uri="{FF2B5EF4-FFF2-40B4-BE49-F238E27FC236}">
+                <a16:creationId xmlns:a16="http://schemas.microsoft.com/office/drawing/2014/main" id="{15BBBC52-5A46-FC6E-EE01-00E77D7667FC}"/>
+              </a:ext>
+            </a:extLst>
+          </p:cNvPr>
+          <p:cNvSpPr/>
+          <p:nvPr/>
+        </p:nvSpPr>
+        <p:spPr>
+          <a:xfrm>
+            <a:off x="2261167" y="3555112"/>
+            <a:ext cx="511278" cy="511278"/>
+          </a:xfrm>
+          <a:prstGeom prst="ellipse">
+            <a:avLst/>
+          </a:prstGeom>
+          <a:solidFill>
+            <a:srgbClr val="00E436"/>
+          </a:solidFill>
+          <a:ln>
+            <a:noFill/>
+          </a:ln>
+        </p:spPr>
+        <p:style>
+          <a:lnRef idx="2">
+            <a:schemeClr val="accent1">
+              <a:shade val="15000"/>
+            </a:schemeClr>
+          </a:lnRef>
+          <a:fillRef idx="1">
+            <a:schemeClr val="accent1"/>
+          </a:fillRef>
+          <a:effectRef idx="0">
+            <a:schemeClr val="accent1"/>
+          </a:effectRef>
+          <a:fontRef idx="minor">
+            <a:schemeClr val="lt1"/>
+          </a:fontRef>
+        </p:style>
+        <p:txBody>
+          <a:bodyPr rtlCol="0" anchor="ctr"/>
+          <a:lstStyle/>
+          <a:p>
+            <a:pPr algn="ctr"/>
+            <a:endParaRPr lang="en-GB"/>
+          </a:p>
+        </p:txBody>
+      </p:sp>
+      <p:sp>
+        <p:nvSpPr>
+          <p:cNvPr id="60" name="Isosceles Triangle 59">
+            <a:extLst>
+              <a:ext uri="{FF2B5EF4-FFF2-40B4-BE49-F238E27FC236}">
+                <a16:creationId xmlns:a16="http://schemas.microsoft.com/office/drawing/2014/main" id="{8913E975-10A2-6227-7077-256C3B31FC53}"/>
+              </a:ext>
+            </a:extLst>
+          </p:cNvPr>
+          <p:cNvSpPr/>
+          <p:nvPr/>
+        </p:nvSpPr>
+        <p:spPr>
+          <a:xfrm rot="13500000">
+            <a:off x="3686364" y="4310500"/>
+            <a:ext cx="220980" cy="190500"/>
+          </a:xfrm>
+          <a:prstGeom prst="triangle">
+            <a:avLst/>
+          </a:prstGeom>
+          <a:solidFill>
+            <a:srgbClr val="FFF1E8"/>
+          </a:solidFill>
+          <a:ln w="57150">
+            <a:solidFill>
+              <a:schemeClr val="tx1"/>
+            </a:solidFill>
+          </a:ln>
+        </p:spPr>
+        <p:style>
+          <a:lnRef idx="2">
+            <a:schemeClr val="accent1">
+              <a:shade val="15000"/>
+            </a:schemeClr>
+          </a:lnRef>
+          <a:fillRef idx="1">
+            <a:schemeClr val="accent1"/>
+          </a:fillRef>
+          <a:effectRef idx="0">
+            <a:schemeClr val="accent1"/>
+          </a:effectRef>
+          <a:fontRef idx="minor">
+            <a:schemeClr val="lt1"/>
+          </a:fontRef>
+        </p:style>
+        <p:txBody>
+          <a:bodyPr rtlCol="0" anchor="ctr"/>
+          <a:lstStyle/>
+          <a:p>
+            <a:pPr algn="ctr"/>
+            <a:endParaRPr lang="en-GB"/>
+          </a:p>
+        </p:txBody>
+      </p:sp>
+      <p:grpSp>
+        <p:nvGrpSpPr>
+          <p:cNvPr id="63" name="Group 62">
+            <a:extLst>
+              <a:ext uri="{FF2B5EF4-FFF2-40B4-BE49-F238E27FC236}">
+                <a16:creationId xmlns:a16="http://schemas.microsoft.com/office/drawing/2014/main" id="{BCF8ED8C-4E42-0B05-0266-948AA93B96D2}"/>
+              </a:ext>
+            </a:extLst>
+          </p:cNvPr>
+          <p:cNvGrpSpPr/>
+          <p:nvPr/>
+        </p:nvGrpSpPr>
+        <p:grpSpPr>
+          <a:xfrm>
+            <a:off x="1740917" y="5855626"/>
+            <a:ext cx="631130" cy="631130"/>
+            <a:chOff x="3796854" y="1946012"/>
+            <a:chExt cx="631130" cy="631130"/>
+          </a:xfrm>
+        </p:grpSpPr>
+        <p:sp>
+          <p:nvSpPr>
+            <p:cNvPr id="61" name="Diamond 60">
+              <a:extLst>
+                <a:ext uri="{FF2B5EF4-FFF2-40B4-BE49-F238E27FC236}">
+                  <a16:creationId xmlns:a16="http://schemas.microsoft.com/office/drawing/2014/main" id="{93A74703-F37C-8749-D7EC-11FD1005F00A}"/>
+                </a:ext>
+              </a:extLst>
+            </p:cNvPr>
+            <p:cNvSpPr/>
+            <p:nvPr/>
+          </p:nvSpPr>
+          <p:spPr>
+            <a:xfrm>
+              <a:off x="3796854" y="1946012"/>
+              <a:ext cx="631130" cy="631130"/>
+            </a:xfrm>
+            <a:prstGeom prst="diamond">
+              <a:avLst/>
+            </a:prstGeom>
+            <a:solidFill>
+              <a:srgbClr val="FF004D"/>
+            </a:solidFill>
+            <a:ln w="57150">
+              <a:solidFill>
+                <a:schemeClr val="tx1"/>
+              </a:solidFill>
+            </a:ln>
+          </p:spPr>
+          <p:style>
+            <a:lnRef idx="2">
+              <a:schemeClr val="accent1">
+                <a:shade val="15000"/>
+              </a:schemeClr>
+            </a:lnRef>
+            <a:fillRef idx="1">
+              <a:schemeClr val="accent1"/>
+            </a:fillRef>
+            <a:effectRef idx="0">
+              <a:schemeClr val="accent1"/>
+            </a:effectRef>
+            <a:fontRef idx="minor">
+              <a:schemeClr val="lt1"/>
+            </a:fontRef>
+          </p:style>
+          <p:txBody>
+            <a:bodyPr rtlCol="0" anchor="ctr"/>
+            <a:lstStyle/>
+            <a:p>
+              <a:pPr algn="ctr"/>
+              <a:endParaRPr lang="en-GB" dirty="0"/>
+            </a:p>
+          </p:txBody>
+        </p:sp>
+        <p:sp>
+          <p:nvSpPr>
+            <p:cNvPr id="62" name="Multiplication Sign 61">
+              <a:extLst>
+                <a:ext uri="{FF2B5EF4-FFF2-40B4-BE49-F238E27FC236}">
+                  <a16:creationId xmlns:a16="http://schemas.microsoft.com/office/drawing/2014/main" id="{447D957B-4A26-3D18-BE09-5C6FA0307EE9}"/>
+                </a:ext>
+              </a:extLst>
+            </p:cNvPr>
+            <p:cNvSpPr/>
+            <p:nvPr/>
+          </p:nvSpPr>
+          <p:spPr>
+            <a:xfrm>
+              <a:off x="3923482" y="2072640"/>
+              <a:ext cx="377874" cy="377874"/>
+            </a:xfrm>
+            <a:prstGeom prst="mathMultiply">
+              <a:avLst>
+                <a:gd name="adj1" fmla="val 10239"/>
+              </a:avLst>
+            </a:prstGeom>
+            <a:solidFill>
+              <a:srgbClr val="000000"/>
+            </a:solidFill>
+            <a:ln>
+              <a:noFill/>
+            </a:ln>
+          </p:spPr>
+          <p:style>
+            <a:lnRef idx="2">
+              <a:schemeClr val="accent1">
+                <a:shade val="15000"/>
+              </a:schemeClr>
+            </a:lnRef>
+            <a:fillRef idx="1">
+              <a:schemeClr val="accent1"/>
+            </a:fillRef>
+            <a:effectRef idx="0">
+              <a:schemeClr val="accent1"/>
+            </a:effectRef>
+            <a:fontRef idx="minor">
+              <a:schemeClr val="lt1"/>
+            </a:fontRef>
+          </p:style>
+          <p:txBody>
+            <a:bodyPr rtlCol="0" anchor="ctr"/>
+            <a:lstStyle/>
+            <a:p>
+              <a:pPr algn="ctr"/>
+              <a:endParaRPr lang="en-GB"/>
+            </a:p>
+          </p:txBody>
+        </p:sp>
+      </p:grpSp>
+      <p:grpSp>
+        <p:nvGrpSpPr>
+          <p:cNvPr id="69" name="Group 68">
+            <a:extLst>
+              <a:ext uri="{FF2B5EF4-FFF2-40B4-BE49-F238E27FC236}">
+                <a16:creationId xmlns:a16="http://schemas.microsoft.com/office/drawing/2014/main" id="{C969991E-9707-CD7A-F8D0-63C8ECE4D889}"/>
+              </a:ext>
+            </a:extLst>
+          </p:cNvPr>
+          <p:cNvGrpSpPr/>
+          <p:nvPr/>
+        </p:nvGrpSpPr>
+        <p:grpSpPr>
+          <a:xfrm>
+            <a:off x="2580025" y="5855626"/>
+            <a:ext cx="631130" cy="631130"/>
+            <a:chOff x="2580025" y="5855626"/>
+            <a:chExt cx="631130" cy="631130"/>
+          </a:xfrm>
+        </p:grpSpPr>
+        <p:sp>
+          <p:nvSpPr>
+            <p:cNvPr id="65" name="Diamond 64">
+              <a:extLst>
+                <a:ext uri="{FF2B5EF4-FFF2-40B4-BE49-F238E27FC236}">
+                  <a16:creationId xmlns:a16="http://schemas.microsoft.com/office/drawing/2014/main" id="{D66A5847-336A-DC79-AF70-EA2000796162}"/>
+                </a:ext>
+              </a:extLst>
+            </p:cNvPr>
+            <p:cNvSpPr/>
+            <p:nvPr/>
+          </p:nvSpPr>
+          <p:spPr>
+            <a:xfrm>
+              <a:off x="2580025" y="5855626"/>
+              <a:ext cx="631130" cy="631130"/>
+            </a:xfrm>
+            <a:prstGeom prst="diamond">
+              <a:avLst/>
+            </a:prstGeom>
+            <a:solidFill>
+              <a:srgbClr val="29ADFF"/>
+            </a:solidFill>
+            <a:ln w="57150">
+              <a:solidFill>
+                <a:schemeClr val="tx1"/>
+              </a:solidFill>
+            </a:ln>
+          </p:spPr>
+          <p:style>
+            <a:lnRef idx="2">
+              <a:schemeClr val="accent1">
+                <a:shade val="15000"/>
+              </a:schemeClr>
+            </a:lnRef>
+            <a:fillRef idx="1">
+              <a:schemeClr val="accent1"/>
+            </a:fillRef>
+            <a:effectRef idx="0">
+              <a:schemeClr val="accent1"/>
+            </a:effectRef>
+            <a:fontRef idx="minor">
+              <a:schemeClr val="lt1"/>
+            </a:fontRef>
+          </p:style>
+          <p:txBody>
+            <a:bodyPr rtlCol="0" anchor="ctr"/>
+            <a:lstStyle/>
+            <a:p>
+              <a:pPr algn="ctr"/>
+              <a:endParaRPr lang="en-GB" dirty="0"/>
+            </a:p>
+          </p:txBody>
+        </p:sp>
+        <p:sp>
+          <p:nvSpPr>
+            <p:cNvPr id="67" name="L-Shape 66">
+              <a:extLst>
+                <a:ext uri="{FF2B5EF4-FFF2-40B4-BE49-F238E27FC236}">
+                  <a16:creationId xmlns:a16="http://schemas.microsoft.com/office/drawing/2014/main" id="{61D858BF-A0B3-76E2-EEF7-1A60BE9EFD8E}"/>
+                </a:ext>
+              </a:extLst>
+            </p:cNvPr>
+            <p:cNvSpPr/>
+            <p:nvPr/>
+          </p:nvSpPr>
+          <p:spPr>
+            <a:xfrm rot="8100000">
+              <a:off x="2803632" y="6047961"/>
+              <a:ext cx="183914" cy="183914"/>
+            </a:xfrm>
+            <a:prstGeom prst="corner">
+              <a:avLst>
+                <a:gd name="adj1" fmla="val 25883"/>
+                <a:gd name="adj2" fmla="val 25265"/>
+              </a:avLst>
+            </a:prstGeom>
+            <a:solidFill>
+              <a:srgbClr val="000000"/>
+            </a:solidFill>
+            <a:ln>
+              <a:noFill/>
+            </a:ln>
+          </p:spPr>
+          <p:style>
+            <a:lnRef idx="2">
+              <a:schemeClr val="accent1">
+                <a:shade val="15000"/>
+              </a:schemeClr>
+            </a:lnRef>
+            <a:fillRef idx="1">
+              <a:schemeClr val="accent1"/>
+            </a:fillRef>
+            <a:effectRef idx="0">
+              <a:schemeClr val="accent1"/>
+            </a:effectRef>
+            <a:fontRef idx="minor">
+              <a:schemeClr val="lt1"/>
+            </a:fontRef>
+          </p:style>
+          <p:txBody>
+            <a:bodyPr rtlCol="0" anchor="ctr"/>
+            <a:lstStyle/>
+            <a:p>
+              <a:pPr algn="ctr"/>
+              <a:endParaRPr lang="en-GB"/>
+            </a:p>
+          </p:txBody>
+        </p:sp>
+        <p:sp>
+          <p:nvSpPr>
+            <p:cNvPr id="68" name="L-Shape 67">
+              <a:extLst>
+                <a:ext uri="{FF2B5EF4-FFF2-40B4-BE49-F238E27FC236}">
+                  <a16:creationId xmlns:a16="http://schemas.microsoft.com/office/drawing/2014/main" id="{499EB1E4-976C-8843-598C-E7B3BF816403}"/>
+                </a:ext>
+              </a:extLst>
+            </p:cNvPr>
+            <p:cNvSpPr/>
+            <p:nvPr/>
+          </p:nvSpPr>
+          <p:spPr>
+            <a:xfrm rot="8100000">
+              <a:off x="2803631" y="6156357"/>
+              <a:ext cx="183914" cy="183914"/>
+            </a:xfrm>
+            <a:prstGeom prst="corner">
+              <a:avLst>
+                <a:gd name="adj1" fmla="val 25883"/>
+                <a:gd name="adj2" fmla="val 25265"/>
+              </a:avLst>
+            </a:prstGeom>
+            <a:solidFill>
+              <a:srgbClr val="000000"/>
+            </a:solidFill>
+            <a:ln>
+              <a:noFill/>
+            </a:ln>
+          </p:spPr>
+          <p:style>
+            <a:lnRef idx="2">
+              <a:schemeClr val="accent1">
+                <a:shade val="15000"/>
+              </a:schemeClr>
+            </a:lnRef>
+            <a:fillRef idx="1">
+              <a:schemeClr val="accent1"/>
+            </a:fillRef>
+            <a:effectRef idx="0">
+              <a:schemeClr val="accent1"/>
+            </a:effectRef>
+            <a:fontRef idx="minor">
+              <a:schemeClr val="lt1"/>
+            </a:fontRef>
+          </p:style>
+          <p:txBody>
+            <a:bodyPr rtlCol="0" anchor="ctr"/>
+            <a:lstStyle/>
+            <a:p>
+              <a:pPr algn="ctr"/>
+              <a:endParaRPr lang="en-GB"/>
+            </a:p>
+          </p:txBody>
+        </p:sp>
+      </p:grpSp>
+      <p:sp>
+        <p:nvSpPr>
+          <p:cNvPr id="70" name="Oval 69">
+            <a:extLst>
+              <a:ext uri="{FF2B5EF4-FFF2-40B4-BE49-F238E27FC236}">
+                <a16:creationId xmlns:a16="http://schemas.microsoft.com/office/drawing/2014/main" id="{6D7F9398-CEA7-78FC-7020-9EBCD108D825}"/>
+              </a:ext>
+            </a:extLst>
+          </p:cNvPr>
+          <p:cNvSpPr/>
+          <p:nvPr/>
+        </p:nvSpPr>
+        <p:spPr>
+          <a:xfrm>
+            <a:off x="2349374" y="3646835"/>
+            <a:ext cx="334864" cy="334864"/>
+          </a:xfrm>
+          <a:prstGeom prst="ellipse">
+            <a:avLst/>
+          </a:prstGeom>
+          <a:solidFill>
+            <a:srgbClr val="008751"/>
+          </a:solidFill>
+          <a:ln>
+            <a:noFill/>
+          </a:ln>
+        </p:spPr>
+        <p:style>
+          <a:lnRef idx="2">
+            <a:schemeClr val="accent1">
+              <a:shade val="15000"/>
+            </a:schemeClr>
+          </a:lnRef>
+          <a:fillRef idx="1">
+            <a:schemeClr val="accent1"/>
+          </a:fillRef>
+          <a:effectRef idx="0">
+            <a:schemeClr val="accent1"/>
+          </a:effectRef>
+          <a:fontRef idx="minor">
+            <a:schemeClr val="lt1"/>
+          </a:fontRef>
+        </p:style>
+        <p:txBody>
+          <a:bodyPr rtlCol="0" anchor="ctr"/>
+          <a:lstStyle/>
+          <a:p>
+            <a:pPr algn="ctr"/>
+            <a:endParaRPr lang="en-GB"/>
+          </a:p>
+        </p:txBody>
+      </p:sp>
+      <p:sp>
+        <p:nvSpPr>
+          <p:cNvPr id="71" name="Oval 70">
+            <a:extLst>
+              <a:ext uri="{FF2B5EF4-FFF2-40B4-BE49-F238E27FC236}">
+                <a16:creationId xmlns:a16="http://schemas.microsoft.com/office/drawing/2014/main" id="{5AE053F3-1E0C-1F7F-4CB1-9E123471D1C0}"/>
+              </a:ext>
+            </a:extLst>
+          </p:cNvPr>
+          <p:cNvSpPr/>
+          <p:nvPr/>
+        </p:nvSpPr>
+        <p:spPr>
+          <a:xfrm>
+            <a:off x="2440142" y="3733092"/>
+            <a:ext cx="169382" cy="169382"/>
+          </a:xfrm>
+          <a:prstGeom prst="ellipse">
+            <a:avLst/>
+          </a:prstGeom>
+          <a:solidFill>
+            <a:srgbClr val="FFCCAA"/>
+          </a:solidFill>
+          <a:ln>
+            <a:noFill/>
+          </a:ln>
+        </p:spPr>
+        <p:style>
+          <a:lnRef idx="2">
+            <a:schemeClr val="accent1">
+              <a:shade val="15000"/>
+            </a:schemeClr>
+          </a:lnRef>
+          <a:fillRef idx="1">
+            <a:schemeClr val="accent1"/>
+          </a:fillRef>
+          <a:effectRef idx="0">
+            <a:schemeClr val="accent1"/>
+          </a:effectRef>
+          <a:fontRef idx="minor">
+            <a:schemeClr val="lt1"/>
+          </a:fontRef>
+        </p:style>
+        <p:txBody>
+          <a:bodyPr rtlCol="0" anchor="ctr"/>
+          <a:lstStyle/>
+          <a:p>
+            <a:pPr algn="ctr"/>
+            <a:endParaRPr lang="en-GB"/>
+          </a:p>
+        </p:txBody>
+      </p:sp>
+      <p:sp>
+        <p:nvSpPr>
+          <p:cNvPr id="72" name="Freeform: Shape 71">
+            <a:extLst>
+              <a:ext uri="{FF2B5EF4-FFF2-40B4-BE49-F238E27FC236}">
+                <a16:creationId xmlns:a16="http://schemas.microsoft.com/office/drawing/2014/main" id="{16EAA1B0-7B6F-0BF6-AC65-BB6F0EDCD629}"/>
+              </a:ext>
+            </a:extLst>
+          </p:cNvPr>
+          <p:cNvSpPr/>
+          <p:nvPr/>
+        </p:nvSpPr>
+        <p:spPr>
+          <a:xfrm>
+            <a:off x="1504174" y="4014274"/>
+            <a:ext cx="199039" cy="183356"/>
+          </a:xfrm>
+          <a:custGeom>
+            <a:avLst/>
+            <a:gdLst>
+              <a:gd name="csX0" fmla="*/ 10818 w 199039"/>
+              <a:gd name="csY0" fmla="*/ 61912 h 183356"/>
+              <a:gd name="csX1" fmla="*/ 117974 w 199039"/>
+              <a:gd name="csY1" fmla="*/ 0 h 183356"/>
+              <a:gd name="csX2" fmla="*/ 141786 w 199039"/>
+              <a:gd name="csY2" fmla="*/ 2381 h 183356"/>
+              <a:gd name="csX3" fmla="*/ 151311 w 199039"/>
+              <a:gd name="csY3" fmla="*/ 7143 h 183356"/>
+              <a:gd name="csX4" fmla="*/ 196555 w 199039"/>
+              <a:gd name="csY4" fmla="*/ 57150 h 183356"/>
+              <a:gd name="csX5" fmla="*/ 191793 w 199039"/>
+              <a:gd name="csY5" fmla="*/ 102393 h 183356"/>
+              <a:gd name="csX6" fmla="*/ 182268 w 199039"/>
+              <a:gd name="csY6" fmla="*/ 116681 h 183356"/>
+              <a:gd name="csX7" fmla="*/ 167980 w 199039"/>
+              <a:gd name="csY7" fmla="*/ 126206 h 183356"/>
+              <a:gd name="csX8" fmla="*/ 113211 w 199039"/>
+              <a:gd name="csY8" fmla="*/ 176212 h 183356"/>
+              <a:gd name="csX9" fmla="*/ 101305 w 199039"/>
+              <a:gd name="csY9" fmla="*/ 178593 h 183356"/>
+              <a:gd name="csX10" fmla="*/ 87018 w 199039"/>
+              <a:gd name="csY10" fmla="*/ 183356 h 183356"/>
+              <a:gd name="csX11" fmla="*/ 41774 w 199039"/>
+              <a:gd name="csY11" fmla="*/ 150018 h 183356"/>
+              <a:gd name="csX12" fmla="*/ 10818 w 199039"/>
+              <a:gd name="csY12" fmla="*/ 126206 h 183356"/>
+              <a:gd name="csX13" fmla="*/ 3674 w 199039"/>
+              <a:gd name="csY13" fmla="*/ 107156 h 183356"/>
+              <a:gd name="csX14" fmla="*/ 10818 w 199039"/>
+              <a:gd name="csY14" fmla="*/ 61912 h 183356"/>
+            </a:gdLst>
+            <a:ahLst/>
+            <a:cxnLst>
+              <a:cxn ang="0">
+                <a:pos x="csX0" y="csY0"/>
+              </a:cxn>
+              <a:cxn ang="0">
+                <a:pos x="csX1" y="csY1"/>
+              </a:cxn>
+              <a:cxn ang="0">
+                <a:pos x="csX2" y="csY2"/>
+              </a:cxn>
+              <a:cxn ang="0">
+                <a:pos x="csX3" y="csY3"/>
+              </a:cxn>
+              <a:cxn ang="0">
+                <a:pos x="csX4" y="csY4"/>
+              </a:cxn>
+              <a:cxn ang="0">
+                <a:pos x="csX5" y="csY5"/>
+              </a:cxn>
+              <a:cxn ang="0">
+                <a:pos x="csX6" y="csY6"/>
+              </a:cxn>
+              <a:cxn ang="0">
+                <a:pos x="csX7" y="csY7"/>
+              </a:cxn>
+              <a:cxn ang="0">
+                <a:pos x="csX8" y="csY8"/>
+              </a:cxn>
+              <a:cxn ang="0">
+                <a:pos x="csX9" y="csY9"/>
+              </a:cxn>
+              <a:cxn ang="0">
+                <a:pos x="csX10" y="csY10"/>
+              </a:cxn>
+              <a:cxn ang="0">
+                <a:pos x="csX11" y="csY11"/>
+              </a:cxn>
+              <a:cxn ang="0">
+                <a:pos x="csX12" y="csY12"/>
+              </a:cxn>
+              <a:cxn ang="0">
+                <a:pos x="csX13" y="csY13"/>
+              </a:cxn>
+              <a:cxn ang="0">
+                <a:pos x="csX14" y="csY14"/>
+              </a:cxn>
+            </a:cxnLst>
+            <a:rect l="l" t="t" r="r" b="b"/>
+            <a:pathLst>
+              <a:path w="199039" h="183356">
+                <a:moveTo>
+                  <a:pt x="10818" y="61912"/>
+                </a:moveTo>
+                <a:cubicBezTo>
+                  <a:pt x="29868" y="44053"/>
+                  <a:pt x="82255" y="20637"/>
+                  <a:pt x="117974" y="0"/>
+                </a:cubicBezTo>
+                <a:cubicBezTo>
+                  <a:pt x="125911" y="794"/>
+                  <a:pt x="133986" y="710"/>
+                  <a:pt x="141786" y="2381"/>
+                </a:cubicBezTo>
+                <a:cubicBezTo>
+                  <a:pt x="145257" y="3125"/>
+                  <a:pt x="148673" y="4768"/>
+                  <a:pt x="151311" y="7143"/>
+                </a:cubicBezTo>
+                <a:cubicBezTo>
+                  <a:pt x="187287" y="39521"/>
+                  <a:pt x="181561" y="32160"/>
+                  <a:pt x="196555" y="57150"/>
+                </a:cubicBezTo>
+                <a:cubicBezTo>
+                  <a:pt x="199599" y="78458"/>
+                  <a:pt x="201567" y="77260"/>
+                  <a:pt x="191793" y="102393"/>
+                </a:cubicBezTo>
+                <a:cubicBezTo>
+                  <a:pt x="189718" y="107728"/>
+                  <a:pt x="187031" y="113506"/>
+                  <a:pt x="182268" y="116681"/>
+                </a:cubicBezTo>
+                <a:cubicBezTo>
+                  <a:pt x="177505" y="119856"/>
+                  <a:pt x="172215" y="122356"/>
+                  <a:pt x="167980" y="126206"/>
+                </a:cubicBezTo>
+                <a:cubicBezTo>
+                  <a:pt x="158613" y="134722"/>
+                  <a:pt x="131736" y="166950"/>
+                  <a:pt x="113211" y="176212"/>
+                </a:cubicBezTo>
+                <a:cubicBezTo>
+                  <a:pt x="109591" y="178022"/>
+                  <a:pt x="105210" y="177528"/>
+                  <a:pt x="101305" y="178593"/>
+                </a:cubicBezTo>
+                <a:cubicBezTo>
+                  <a:pt x="96462" y="179914"/>
+                  <a:pt x="91780" y="181768"/>
+                  <a:pt x="87018" y="183356"/>
+                </a:cubicBezTo>
+                <a:cubicBezTo>
+                  <a:pt x="57550" y="173533"/>
+                  <a:pt x="81617" y="183731"/>
+                  <a:pt x="41774" y="150018"/>
+                </a:cubicBezTo>
+                <a:cubicBezTo>
+                  <a:pt x="31836" y="141609"/>
+                  <a:pt x="21137" y="134143"/>
+                  <a:pt x="10818" y="126206"/>
+                </a:cubicBezTo>
+                <a:cubicBezTo>
+                  <a:pt x="8108" y="120786"/>
+                  <a:pt x="3674" y="113642"/>
+                  <a:pt x="3674" y="107156"/>
+                </a:cubicBezTo>
+                <a:cubicBezTo>
+                  <a:pt x="3674" y="87318"/>
+                  <a:pt x="-8232" y="79771"/>
+                  <a:pt x="10818" y="61912"/>
+                </a:cubicBezTo>
+                <a:close/>
+              </a:path>
+            </a:pathLst>
+          </a:custGeom>
+          <a:solidFill>
+            <a:srgbClr val="FFCCAA"/>
+          </a:solidFill>
+          <a:ln>
+            <a:noFill/>
+          </a:ln>
+        </p:spPr>
+        <p:style>
+          <a:lnRef idx="2">
+            <a:schemeClr val="accent1">
+              <a:shade val="15000"/>
+            </a:schemeClr>
+          </a:lnRef>
+          <a:fillRef idx="1">
+            <a:schemeClr val="accent1"/>
+          </a:fillRef>
+          <a:effectRef idx="0">
+            <a:schemeClr val="accent1"/>
+          </a:effectRef>
+          <a:fontRef idx="minor">
+            <a:schemeClr val="lt1"/>
+          </a:fontRef>
+        </p:style>
+        <p:txBody>
+          <a:bodyPr rtlCol="0" anchor="ctr"/>
+          <a:lstStyle/>
+          <a:p>
+            <a:pPr algn="ctr"/>
+            <a:endParaRPr lang="en-GB"/>
+          </a:p>
+        </p:txBody>
+      </p:sp>
     </p:spTree>
     <p:extLst>
       <p:ext uri="{BB962C8B-B14F-4D97-AF65-F5344CB8AC3E}">
         <p14:creationId xmlns:p14="http://schemas.microsoft.com/office/powerpoint/2010/main" val="1139958654"/>
+      </p:ext>
+    </p:extLst>
+  </p:cSld>
+  <p:clrMapOvr>
+    <a:masterClrMapping/>
+  </p:clrMapOvr>
+</p:sld>
+</file>
+
+<file path=ppt/slides/slide2.xml><?xml version="1.0" encoding="utf-8"?>
+<p:sld xmlns:a="http://schemas.openxmlformats.org/drawingml/2006/main" xmlns:r="http://schemas.openxmlformats.org/officeDocument/2006/relationships" xmlns:p="http://schemas.openxmlformats.org/presentationml/2006/main">
+  <p:cSld>
+    <p:spTree>
+      <p:nvGrpSpPr>
+        <p:cNvPr id="1" name=""/>
+        <p:cNvGrpSpPr/>
+        <p:nvPr/>
+      </p:nvGrpSpPr>
+      <p:grpSpPr>
+        <a:xfrm>
+          <a:off x="0" y="0"/>
+          <a:ext cx="0" cy="0"/>
+          <a:chOff x="0" y="0"/>
+          <a:chExt cx="0" cy="0"/>
+        </a:xfrm>
+      </p:grpSpPr>
+      <p:grpSp>
+        <p:nvGrpSpPr>
+          <p:cNvPr id="5" name="Group 4">
+            <a:extLst>
+              <a:ext uri="{FF2B5EF4-FFF2-40B4-BE49-F238E27FC236}">
+                <a16:creationId xmlns:a16="http://schemas.microsoft.com/office/drawing/2014/main" id="{2F7AA1A9-7F8D-5999-9D7A-37FD2FB03510}"/>
+              </a:ext>
+            </a:extLst>
+          </p:cNvPr>
+          <p:cNvGrpSpPr/>
+          <p:nvPr/>
+        </p:nvGrpSpPr>
+        <p:grpSpPr>
+          <a:xfrm>
+            <a:off x="2268864" y="1699266"/>
+            <a:ext cx="519145" cy="512370"/>
+            <a:chOff x="2268864" y="1699266"/>
+            <a:chExt cx="519145" cy="512370"/>
+          </a:xfrm>
+        </p:grpSpPr>
+        <p:grpSp>
+          <p:nvGrpSpPr>
+            <p:cNvPr id="4" name="Group 3">
+              <a:extLst>
+                <a:ext uri="{FF2B5EF4-FFF2-40B4-BE49-F238E27FC236}">
+                  <a16:creationId xmlns:a16="http://schemas.microsoft.com/office/drawing/2014/main" id="{04B37C47-FA1C-5820-64EA-20010B14EB08}"/>
+                </a:ext>
+              </a:extLst>
+            </p:cNvPr>
+            <p:cNvGrpSpPr/>
+            <p:nvPr/>
+          </p:nvGrpSpPr>
+          <p:grpSpPr>
+            <a:xfrm>
+              <a:off x="2268864" y="1699266"/>
+              <a:ext cx="500949" cy="220980"/>
+              <a:chOff x="2268864" y="1699266"/>
+              <a:chExt cx="500949" cy="220980"/>
+            </a:xfrm>
+            <a:solidFill>
+              <a:srgbClr val="FFF1E8"/>
+            </a:solidFill>
+          </p:grpSpPr>
+          <p:sp>
+            <p:nvSpPr>
+              <p:cNvPr id="22" name="Isosceles Triangle 21">
+                <a:extLst>
+                  <a:ext uri="{FF2B5EF4-FFF2-40B4-BE49-F238E27FC236}">
+                    <a16:creationId xmlns:a16="http://schemas.microsoft.com/office/drawing/2014/main" id="{9D2CD25C-DA82-418B-7936-F27E807477BB}"/>
+                  </a:ext>
+                </a:extLst>
+              </p:cNvPr>
+              <p:cNvSpPr/>
+              <p:nvPr/>
+            </p:nvSpPr>
+            <p:spPr>
+              <a:xfrm rot="8100000">
+                <a:off x="2268864" y="1714503"/>
+                <a:ext cx="220980" cy="190500"/>
+              </a:xfrm>
+              <a:prstGeom prst="triangle">
+                <a:avLst/>
+              </a:prstGeom>
+              <a:grpFill/>
+              <a:ln w="57150">
+                <a:solidFill>
+                  <a:schemeClr val="tx1"/>
+                </a:solidFill>
+              </a:ln>
+            </p:spPr>
+            <p:style>
+              <a:lnRef idx="2">
+                <a:schemeClr val="accent1">
+                  <a:shade val="15000"/>
+                </a:schemeClr>
+              </a:lnRef>
+              <a:fillRef idx="1">
+                <a:schemeClr val="accent1"/>
+              </a:fillRef>
+              <a:effectRef idx="0">
+                <a:schemeClr val="accent1"/>
+              </a:effectRef>
+              <a:fontRef idx="minor">
+                <a:schemeClr val="lt1"/>
+              </a:fontRef>
+            </p:style>
+            <p:txBody>
+              <a:bodyPr rtlCol="0" anchor="ctr"/>
+              <a:lstStyle/>
+              <a:p>
+                <a:pPr algn="ctr"/>
+                <a:endParaRPr lang="en-GB"/>
+              </a:p>
+            </p:txBody>
+          </p:sp>
+          <p:sp>
+            <p:nvSpPr>
+              <p:cNvPr id="23" name="Isosceles Triangle 22">
+                <a:extLst>
+                  <a:ext uri="{FF2B5EF4-FFF2-40B4-BE49-F238E27FC236}">
+                    <a16:creationId xmlns:a16="http://schemas.microsoft.com/office/drawing/2014/main" id="{5FA3461C-6C91-33B1-23DC-4AD9F422084F}"/>
+                  </a:ext>
+                </a:extLst>
+              </p:cNvPr>
+              <p:cNvSpPr/>
+              <p:nvPr/>
+            </p:nvSpPr>
+            <p:spPr>
+              <a:xfrm rot="13500000">
+                <a:off x="2564073" y="1714506"/>
+                <a:ext cx="220980" cy="190500"/>
+              </a:xfrm>
+              <a:prstGeom prst="triangle">
+                <a:avLst/>
+              </a:prstGeom>
+              <a:grpFill/>
+              <a:ln w="57150">
+                <a:solidFill>
+                  <a:schemeClr val="tx1"/>
+                </a:solidFill>
+              </a:ln>
+            </p:spPr>
+            <p:style>
+              <a:lnRef idx="2">
+                <a:schemeClr val="accent1">
+                  <a:shade val="15000"/>
+                </a:schemeClr>
+              </a:lnRef>
+              <a:fillRef idx="1">
+                <a:schemeClr val="accent1"/>
+              </a:fillRef>
+              <a:effectRef idx="0">
+                <a:schemeClr val="accent1"/>
+              </a:effectRef>
+              <a:fontRef idx="minor">
+                <a:schemeClr val="lt1"/>
+              </a:fontRef>
+            </p:style>
+            <p:txBody>
+              <a:bodyPr rtlCol="0" anchor="ctr"/>
+              <a:lstStyle/>
+              <a:p>
+                <a:pPr algn="ctr"/>
+                <a:endParaRPr lang="en-GB"/>
+              </a:p>
+            </p:txBody>
+          </p:sp>
+        </p:grpSp>
+        <p:grpSp>
+          <p:nvGrpSpPr>
+            <p:cNvPr id="26" name="Group 25">
+              <a:extLst>
+                <a:ext uri="{FF2B5EF4-FFF2-40B4-BE49-F238E27FC236}">
+                  <a16:creationId xmlns:a16="http://schemas.microsoft.com/office/drawing/2014/main" id="{FDA703FE-6A9A-38EE-C914-24248F74A13E}"/>
+                </a:ext>
+              </a:extLst>
+            </p:cNvPr>
+            <p:cNvGrpSpPr/>
+            <p:nvPr/>
+          </p:nvGrpSpPr>
+          <p:grpSpPr>
+            <a:xfrm rot="10800000">
+              <a:off x="2287060" y="1990656"/>
+              <a:ext cx="500949" cy="220980"/>
+              <a:chOff x="2421264" y="1851666"/>
+              <a:chExt cx="500949" cy="220980"/>
+            </a:xfrm>
+            <a:solidFill>
+              <a:srgbClr val="FFF1E8"/>
+            </a:solidFill>
+          </p:grpSpPr>
+          <p:sp>
+            <p:nvSpPr>
+              <p:cNvPr id="24" name="Isosceles Triangle 23">
+                <a:extLst>
+                  <a:ext uri="{FF2B5EF4-FFF2-40B4-BE49-F238E27FC236}">
+                    <a16:creationId xmlns:a16="http://schemas.microsoft.com/office/drawing/2014/main" id="{29882A44-82DF-C7AB-453B-711D4D21E534}"/>
+                  </a:ext>
+                </a:extLst>
+              </p:cNvPr>
+              <p:cNvSpPr/>
+              <p:nvPr/>
+            </p:nvSpPr>
+            <p:spPr>
+              <a:xfrm rot="8100000">
+                <a:off x="2421264" y="1866903"/>
+                <a:ext cx="220980" cy="190500"/>
+              </a:xfrm>
+              <a:prstGeom prst="triangle">
+                <a:avLst/>
+              </a:prstGeom>
+              <a:grpFill/>
+              <a:ln w="57150">
+                <a:solidFill>
+                  <a:schemeClr val="tx1"/>
+                </a:solidFill>
+              </a:ln>
+            </p:spPr>
+            <p:style>
+              <a:lnRef idx="2">
+                <a:schemeClr val="accent1">
+                  <a:shade val="15000"/>
+                </a:schemeClr>
+              </a:lnRef>
+              <a:fillRef idx="1">
+                <a:schemeClr val="accent1"/>
+              </a:fillRef>
+              <a:effectRef idx="0">
+                <a:schemeClr val="accent1"/>
+              </a:effectRef>
+              <a:fontRef idx="minor">
+                <a:schemeClr val="lt1"/>
+              </a:fontRef>
+            </p:style>
+            <p:txBody>
+              <a:bodyPr rtlCol="0" anchor="ctr"/>
+              <a:lstStyle/>
+              <a:p>
+                <a:pPr algn="ctr"/>
+                <a:endParaRPr lang="en-GB"/>
+              </a:p>
+            </p:txBody>
+          </p:sp>
+          <p:sp>
+            <p:nvSpPr>
+              <p:cNvPr id="25" name="Isosceles Triangle 24">
+                <a:extLst>
+                  <a:ext uri="{FF2B5EF4-FFF2-40B4-BE49-F238E27FC236}">
+                    <a16:creationId xmlns:a16="http://schemas.microsoft.com/office/drawing/2014/main" id="{CE9E83E3-E08D-1EEE-9875-A841039959DC}"/>
+                  </a:ext>
+                </a:extLst>
+              </p:cNvPr>
+              <p:cNvSpPr/>
+              <p:nvPr/>
+            </p:nvSpPr>
+            <p:spPr>
+              <a:xfrm rot="13500000">
+                <a:off x="2716473" y="1866906"/>
+                <a:ext cx="220980" cy="190500"/>
+              </a:xfrm>
+              <a:prstGeom prst="triangle">
+                <a:avLst/>
+              </a:prstGeom>
+              <a:grpFill/>
+              <a:ln w="57150">
+                <a:solidFill>
+                  <a:schemeClr val="tx1"/>
+                </a:solidFill>
+              </a:ln>
+            </p:spPr>
+            <p:style>
+              <a:lnRef idx="2">
+                <a:schemeClr val="accent1">
+                  <a:shade val="15000"/>
+                </a:schemeClr>
+              </a:lnRef>
+              <a:fillRef idx="1">
+                <a:schemeClr val="accent1"/>
+              </a:fillRef>
+              <a:effectRef idx="0">
+                <a:schemeClr val="accent1"/>
+              </a:effectRef>
+              <a:fontRef idx="minor">
+                <a:schemeClr val="lt1"/>
+              </a:fontRef>
+            </p:style>
+            <p:txBody>
+              <a:bodyPr rtlCol="0" anchor="ctr"/>
+              <a:lstStyle/>
+              <a:p>
+                <a:pPr algn="ctr"/>
+                <a:endParaRPr lang="en-GB"/>
+              </a:p>
+            </p:txBody>
+          </p:sp>
+        </p:grpSp>
+      </p:grpSp>
+    </p:spTree>
+    <p:extLst>
+      <p:ext uri="{BB962C8B-B14F-4D97-AF65-F5344CB8AC3E}">
+        <p14:creationId xmlns:p14="http://schemas.microsoft.com/office/powerpoint/2010/main" val="1649178389"/>
       </p:ext>
     </p:extLst>
   </p:cSld>

--- a/assets/art.pptx
+++ b/assets/art.pptx
@@ -5,11 +5,12 @@
     <p:sldMasterId id="2147483648" r:id="rId1"/>
   </p:sldMasterIdLst>
   <p:notesMasterIdLst>
-    <p:notesMasterId r:id="rId4"/>
+    <p:notesMasterId r:id="rId5"/>
   </p:notesMasterIdLst>
   <p:sldIdLst>
     <p:sldId id="256" r:id="rId2"/>
     <p:sldId id="257" r:id="rId3"/>
+    <p:sldId id="258" r:id="rId4"/>
   </p:sldIdLst>
   <p:sldSz cx="12192000" cy="6858000"/>
   <p:notesSz cx="6858000" cy="9144000"/>
@@ -3817,187 +3818,6 @@
       </p:pic>
       <p:grpSp>
         <p:nvGrpSpPr>
-          <p:cNvPr id="7" name="Group 6">
-            <a:extLst>
-              <a:ext uri="{FF2B5EF4-FFF2-40B4-BE49-F238E27FC236}">
-                <a16:creationId xmlns:a16="http://schemas.microsoft.com/office/drawing/2014/main" id="{F6943739-60E4-CFAE-FCCC-977DE67992A4}"/>
-              </a:ext>
-            </a:extLst>
-          </p:cNvPr>
-          <p:cNvGrpSpPr/>
-          <p:nvPr/>
-        </p:nvGrpSpPr>
-        <p:grpSpPr>
-          <a:xfrm>
-            <a:off x="2601555" y="2588984"/>
-            <a:ext cx="511276" cy="563793"/>
-            <a:chOff x="3443749" y="1809752"/>
-            <a:chExt cx="511276" cy="563793"/>
-          </a:xfrm>
-        </p:grpSpPr>
-        <p:sp>
-          <p:nvSpPr>
-            <p:cNvPr id="4" name="Oval 3">
-              <a:extLst>
-                <a:ext uri="{FF2B5EF4-FFF2-40B4-BE49-F238E27FC236}">
-                  <a16:creationId xmlns:a16="http://schemas.microsoft.com/office/drawing/2014/main" id="{6FBC9C08-D5E6-6DEF-AF6E-6B3103B1D672}"/>
-                </a:ext>
-              </a:extLst>
-            </p:cNvPr>
-            <p:cNvSpPr/>
-            <p:nvPr/>
-          </p:nvSpPr>
-          <p:spPr>
-            <a:xfrm>
-              <a:off x="3443749" y="1809752"/>
-              <a:ext cx="511276" cy="511276"/>
-            </a:xfrm>
-            <a:prstGeom prst="ellipse">
-              <a:avLst/>
-            </a:prstGeom>
-            <a:solidFill>
-              <a:srgbClr val="FFF1E8"/>
-            </a:solidFill>
-            <a:ln w="57150">
-              <a:solidFill>
-                <a:schemeClr val="tx1"/>
-              </a:solidFill>
-            </a:ln>
-          </p:spPr>
-          <p:style>
-            <a:lnRef idx="2">
-              <a:schemeClr val="accent1">
-                <a:shade val="15000"/>
-              </a:schemeClr>
-            </a:lnRef>
-            <a:fillRef idx="1">
-              <a:schemeClr val="accent1"/>
-            </a:fillRef>
-            <a:effectRef idx="0">
-              <a:schemeClr val="accent1"/>
-            </a:effectRef>
-            <a:fontRef idx="minor">
-              <a:schemeClr val="lt1"/>
-            </a:fontRef>
-          </p:style>
-          <p:txBody>
-            <a:bodyPr rtlCol="0" anchor="ctr"/>
-            <a:lstStyle/>
-            <a:p>
-              <a:pPr algn="ctr"/>
-              <a:endParaRPr lang="en-GB"/>
-            </a:p>
-          </p:txBody>
-        </p:sp>
-        <p:sp>
-          <p:nvSpPr>
-            <p:cNvPr id="5" name="Moon 4">
-              <a:extLst>
-                <a:ext uri="{FF2B5EF4-FFF2-40B4-BE49-F238E27FC236}">
-                  <a16:creationId xmlns:a16="http://schemas.microsoft.com/office/drawing/2014/main" id="{C84A9A74-02FC-76A6-A629-6CDD721F5C39}"/>
-                </a:ext>
-              </a:extLst>
-            </p:cNvPr>
-            <p:cNvSpPr/>
-            <p:nvPr/>
-          </p:nvSpPr>
-          <p:spPr>
-            <a:xfrm rot="18900000">
-              <a:off x="3494655" y="1906513"/>
-              <a:ext cx="256022" cy="467032"/>
-            </a:xfrm>
-            <a:prstGeom prst="moon">
-              <a:avLst>
-                <a:gd name="adj" fmla="val 28954"/>
-              </a:avLst>
-            </a:prstGeom>
-            <a:solidFill>
-              <a:srgbClr val="FFCCAA"/>
-            </a:solidFill>
-            <a:ln>
-              <a:noFill/>
-            </a:ln>
-          </p:spPr>
-          <p:style>
-            <a:lnRef idx="2">
-              <a:schemeClr val="accent1">
-                <a:shade val="15000"/>
-              </a:schemeClr>
-            </a:lnRef>
-            <a:fillRef idx="1">
-              <a:schemeClr val="accent1"/>
-            </a:fillRef>
-            <a:effectRef idx="0">
-              <a:schemeClr val="accent1"/>
-            </a:effectRef>
-            <a:fontRef idx="minor">
-              <a:schemeClr val="lt1"/>
-            </a:fontRef>
-          </p:style>
-          <p:txBody>
-            <a:bodyPr rtlCol="0" anchor="ctr"/>
-            <a:lstStyle/>
-            <a:p>
-              <a:pPr algn="ctr"/>
-              <a:endParaRPr lang="en-GB"/>
-            </a:p>
-          </p:txBody>
-        </p:sp>
-        <p:sp>
-          <p:nvSpPr>
-            <p:cNvPr id="6" name="Oval 5">
-              <a:extLst>
-                <a:ext uri="{FF2B5EF4-FFF2-40B4-BE49-F238E27FC236}">
-                  <a16:creationId xmlns:a16="http://schemas.microsoft.com/office/drawing/2014/main" id="{6C1619BA-5E61-CDAB-694A-251246482473}"/>
-                </a:ext>
-              </a:extLst>
-            </p:cNvPr>
-            <p:cNvSpPr/>
-            <p:nvPr/>
-          </p:nvSpPr>
-          <p:spPr>
-            <a:xfrm>
-              <a:off x="3443749" y="1809752"/>
-              <a:ext cx="511276" cy="511276"/>
-            </a:xfrm>
-            <a:prstGeom prst="ellipse">
-              <a:avLst/>
-            </a:prstGeom>
-            <a:noFill/>
-            <a:ln w="57150">
-              <a:solidFill>
-                <a:schemeClr val="tx1"/>
-              </a:solidFill>
-            </a:ln>
-          </p:spPr>
-          <p:style>
-            <a:lnRef idx="2">
-              <a:schemeClr val="accent1">
-                <a:shade val="15000"/>
-              </a:schemeClr>
-            </a:lnRef>
-            <a:fillRef idx="1">
-              <a:schemeClr val="accent1"/>
-            </a:fillRef>
-            <a:effectRef idx="0">
-              <a:schemeClr val="accent1"/>
-            </a:effectRef>
-            <a:fontRef idx="minor">
-              <a:schemeClr val="lt1"/>
-            </a:fontRef>
-          </p:style>
-          <p:txBody>
-            <a:bodyPr rtlCol="0" anchor="ctr"/>
-            <a:lstStyle/>
-            <a:p>
-              <a:pPr algn="ctr"/>
-              <a:endParaRPr lang="en-GB" dirty="0"/>
-            </a:p>
-          </p:txBody>
-        </p:sp>
-      </p:grpSp>
-      <p:grpSp>
-        <p:nvGrpSpPr>
           <p:cNvPr id="49" name="Group 48">
             <a:extLst>
               <a:ext uri="{FF2B5EF4-FFF2-40B4-BE49-F238E27FC236}">
@@ -4862,7 +4682,7 @@
         </p:nvGrpSpPr>
         <p:grpSpPr>
           <a:xfrm>
-            <a:off x="7349058" y="5404280"/>
+            <a:off x="8809657" y="5544602"/>
             <a:ext cx="519145" cy="512370"/>
             <a:chOff x="2268864" y="1699266"/>
             <a:chExt cx="519145" cy="512370"/>
@@ -5153,7 +4973,7 @@
         </p:blipFill>
         <p:spPr>
           <a:xfrm>
-            <a:off x="1991955" y="4668688"/>
+            <a:off x="3139487" y="4832337"/>
             <a:ext cx="1219200" cy="1219200"/>
           </a:xfrm>
           <a:prstGeom prst="rect">
@@ -5308,7 +5128,7 @@
         </p:blipFill>
         <p:spPr>
           <a:xfrm>
-            <a:off x="4182780" y="5060289"/>
+            <a:off x="4844755" y="5195207"/>
             <a:ext cx="2628900" cy="1590675"/>
           </a:xfrm>
           <a:prstGeom prst="rect">
@@ -5436,7 +5256,7 @@
         </p:nvGrpSpPr>
         <p:grpSpPr>
           <a:xfrm>
-            <a:off x="1740917" y="5855626"/>
+            <a:off x="734270" y="5836072"/>
             <a:ext cx="631130" cy="631130"/>
             <a:chOff x="3796854" y="1946012"/>
             <a:chExt cx="631130" cy="631130"/>
@@ -5565,7 +5385,7 @@
         </p:nvGrpSpPr>
         <p:grpSpPr>
           <a:xfrm>
-            <a:off x="2580025" y="5855626"/>
+            <a:off x="1573378" y="5836072"/>
             <a:ext cx="631130" cy="631130"/>
             <a:chOff x="2580025" y="5855626"/>
             <a:chExt cx="631130" cy="631130"/>
@@ -6051,6 +5871,897 @@
           </a:p>
         </p:txBody>
       </p:sp>
+      <p:sp>
+        <p:nvSpPr>
+          <p:cNvPr id="13" name="Cross 12">
+            <a:extLst>
+              <a:ext uri="{FF2B5EF4-FFF2-40B4-BE49-F238E27FC236}">
+                <a16:creationId xmlns:a16="http://schemas.microsoft.com/office/drawing/2014/main" id="{FA90D27D-7FBA-3AB3-F655-AC88058043F2}"/>
+              </a:ext>
+            </a:extLst>
+          </p:cNvPr>
+          <p:cNvSpPr/>
+          <p:nvPr/>
+        </p:nvSpPr>
+        <p:spPr>
+          <a:xfrm>
+            <a:off x="2027221" y="1038832"/>
+            <a:ext cx="1164605" cy="1164605"/>
+          </a:xfrm>
+          <a:prstGeom prst="plus">
+            <a:avLst>
+              <a:gd name="adj" fmla="val 42164"/>
+            </a:avLst>
+          </a:prstGeom>
+          <a:solidFill>
+            <a:srgbClr val="83769C"/>
+          </a:solidFill>
+          <a:ln w="57150">
+            <a:solidFill>
+              <a:schemeClr val="tx1"/>
+            </a:solidFill>
+          </a:ln>
+        </p:spPr>
+        <p:style>
+          <a:lnRef idx="2">
+            <a:schemeClr val="accent1">
+              <a:shade val="15000"/>
+            </a:schemeClr>
+          </a:lnRef>
+          <a:fillRef idx="1">
+            <a:schemeClr val="accent1"/>
+          </a:fillRef>
+          <a:effectRef idx="0">
+            <a:schemeClr val="accent1"/>
+          </a:effectRef>
+          <a:fontRef idx="minor">
+            <a:schemeClr val="lt1"/>
+          </a:fontRef>
+        </p:style>
+        <p:txBody>
+          <a:bodyPr rtlCol="0" anchor="ctr"/>
+          <a:lstStyle/>
+          <a:p>
+            <a:pPr algn="ctr"/>
+            <a:endParaRPr lang="en-GB"/>
+          </a:p>
+        </p:txBody>
+      </p:sp>
+      <p:sp>
+        <p:nvSpPr>
+          <p:cNvPr id="17" name="Rectangle: Rounded Corners 16">
+            <a:extLst>
+              <a:ext uri="{FF2B5EF4-FFF2-40B4-BE49-F238E27FC236}">
+                <a16:creationId xmlns:a16="http://schemas.microsoft.com/office/drawing/2014/main" id="{3984216C-0CF1-964A-3954-1354FAB9AFE5}"/>
+              </a:ext>
+            </a:extLst>
+          </p:cNvPr>
+          <p:cNvSpPr/>
+          <p:nvPr/>
+        </p:nvSpPr>
+        <p:spPr>
+          <a:xfrm>
+            <a:off x="1347631" y="1020174"/>
+            <a:ext cx="313086" cy="1183263"/>
+          </a:xfrm>
+          <a:prstGeom prst="roundRect">
+            <a:avLst/>
+          </a:prstGeom>
+          <a:solidFill>
+            <a:srgbClr val="83769C"/>
+          </a:solidFill>
+          <a:ln w="57150">
+            <a:solidFill>
+              <a:schemeClr val="tx1"/>
+            </a:solidFill>
+          </a:ln>
+        </p:spPr>
+        <p:style>
+          <a:lnRef idx="2">
+            <a:schemeClr val="accent1">
+              <a:shade val="15000"/>
+            </a:schemeClr>
+          </a:lnRef>
+          <a:fillRef idx="1">
+            <a:schemeClr val="accent1"/>
+          </a:fillRef>
+          <a:effectRef idx="0">
+            <a:schemeClr val="accent1"/>
+          </a:effectRef>
+          <a:fontRef idx="minor">
+            <a:schemeClr val="lt1"/>
+          </a:fontRef>
+        </p:style>
+        <p:txBody>
+          <a:bodyPr rtlCol="0" anchor="ctr"/>
+          <a:lstStyle/>
+          <a:p>
+            <a:pPr algn="ctr"/>
+            <a:endParaRPr lang="en-GB"/>
+          </a:p>
+        </p:txBody>
+      </p:sp>
+      <p:grpSp>
+        <p:nvGrpSpPr>
+          <p:cNvPr id="35" name="Group 34">
+            <a:extLst>
+              <a:ext uri="{FF2B5EF4-FFF2-40B4-BE49-F238E27FC236}">
+                <a16:creationId xmlns:a16="http://schemas.microsoft.com/office/drawing/2014/main" id="{40DF0BFA-0AFF-8910-2AAB-5852AEFE5EDC}"/>
+              </a:ext>
+            </a:extLst>
+          </p:cNvPr>
+          <p:cNvGrpSpPr/>
+          <p:nvPr/>
+        </p:nvGrpSpPr>
+        <p:grpSpPr>
+          <a:xfrm>
+            <a:off x="2412486" y="5804799"/>
+            <a:ext cx="631130" cy="631130"/>
+            <a:chOff x="3419133" y="5824353"/>
+            <a:chExt cx="631130" cy="631130"/>
+          </a:xfrm>
+        </p:grpSpPr>
+        <p:sp>
+          <p:nvSpPr>
+            <p:cNvPr id="23" name="Diamond 22">
+              <a:extLst>
+                <a:ext uri="{FF2B5EF4-FFF2-40B4-BE49-F238E27FC236}">
+                  <a16:creationId xmlns:a16="http://schemas.microsoft.com/office/drawing/2014/main" id="{1F0BA658-A65C-A1D5-83C9-4ED923917C24}"/>
+                </a:ext>
+              </a:extLst>
+            </p:cNvPr>
+            <p:cNvSpPr/>
+            <p:nvPr/>
+          </p:nvSpPr>
+          <p:spPr>
+            <a:xfrm>
+              <a:off x="3419133" y="5824353"/>
+              <a:ext cx="631130" cy="631130"/>
+            </a:xfrm>
+            <a:prstGeom prst="diamond">
+              <a:avLst/>
+            </a:prstGeom>
+            <a:solidFill>
+              <a:srgbClr val="FFEC27"/>
+            </a:solidFill>
+            <a:ln w="57150">
+              <a:solidFill>
+                <a:schemeClr val="tx1"/>
+              </a:solidFill>
+            </a:ln>
+          </p:spPr>
+          <p:style>
+            <a:lnRef idx="2">
+              <a:schemeClr val="accent1">
+                <a:shade val="15000"/>
+              </a:schemeClr>
+            </a:lnRef>
+            <a:fillRef idx="1">
+              <a:schemeClr val="accent1"/>
+            </a:fillRef>
+            <a:effectRef idx="0">
+              <a:schemeClr val="accent1"/>
+            </a:effectRef>
+            <a:fontRef idx="minor">
+              <a:schemeClr val="lt1"/>
+            </a:fontRef>
+          </p:style>
+          <p:txBody>
+            <a:bodyPr rtlCol="0" anchor="ctr"/>
+            <a:lstStyle/>
+            <a:p>
+              <a:pPr algn="ctr"/>
+              <a:endParaRPr lang="en-GB" dirty="0"/>
+            </a:p>
+          </p:txBody>
+        </p:sp>
+        <p:sp>
+          <p:nvSpPr>
+            <p:cNvPr id="26" name="Oval 25">
+              <a:extLst>
+                <a:ext uri="{FF2B5EF4-FFF2-40B4-BE49-F238E27FC236}">
+                  <a16:creationId xmlns:a16="http://schemas.microsoft.com/office/drawing/2014/main" id="{034149D0-DB61-D428-7D92-14F65DD9D6C1}"/>
+                </a:ext>
+              </a:extLst>
+            </p:cNvPr>
+            <p:cNvSpPr/>
+            <p:nvPr/>
+          </p:nvSpPr>
+          <p:spPr>
+            <a:xfrm>
+              <a:off x="3580767" y="6139918"/>
+              <a:ext cx="307862" cy="82946"/>
+            </a:xfrm>
+            <a:prstGeom prst="ellipse">
+              <a:avLst/>
+            </a:prstGeom>
+            <a:solidFill>
+              <a:srgbClr val="FFEC27"/>
+            </a:solidFill>
+            <a:ln w="57150">
+              <a:solidFill>
+                <a:schemeClr val="tx1"/>
+              </a:solidFill>
+            </a:ln>
+          </p:spPr>
+          <p:style>
+            <a:lnRef idx="2">
+              <a:schemeClr val="accent1">
+                <a:shade val="15000"/>
+              </a:schemeClr>
+            </a:lnRef>
+            <a:fillRef idx="1">
+              <a:schemeClr val="accent1"/>
+            </a:fillRef>
+            <a:effectRef idx="0">
+              <a:schemeClr val="accent1"/>
+            </a:effectRef>
+            <a:fontRef idx="minor">
+              <a:schemeClr val="lt1"/>
+            </a:fontRef>
+          </p:style>
+          <p:txBody>
+            <a:bodyPr rtlCol="0" anchor="ctr"/>
+            <a:lstStyle/>
+            <a:p>
+              <a:pPr algn="ctr"/>
+              <a:endParaRPr lang="en-GB"/>
+            </a:p>
+          </p:txBody>
+        </p:sp>
+        <p:sp>
+          <p:nvSpPr>
+            <p:cNvPr id="34" name="Oval 33">
+              <a:extLst>
+                <a:ext uri="{FF2B5EF4-FFF2-40B4-BE49-F238E27FC236}">
+                  <a16:creationId xmlns:a16="http://schemas.microsoft.com/office/drawing/2014/main" id="{6C9F6811-28E6-83F5-9241-27CBFC487F6D}"/>
+                </a:ext>
+              </a:extLst>
+            </p:cNvPr>
+            <p:cNvSpPr/>
+            <p:nvPr/>
+          </p:nvSpPr>
+          <p:spPr>
+            <a:xfrm>
+              <a:off x="3580767" y="6056972"/>
+              <a:ext cx="307862" cy="82946"/>
+            </a:xfrm>
+            <a:prstGeom prst="ellipse">
+              <a:avLst/>
+            </a:prstGeom>
+            <a:solidFill>
+              <a:srgbClr val="FFEC27"/>
+            </a:solidFill>
+            <a:ln w="57150">
+              <a:solidFill>
+                <a:schemeClr val="tx1"/>
+              </a:solidFill>
+            </a:ln>
+          </p:spPr>
+          <p:style>
+            <a:lnRef idx="2">
+              <a:schemeClr val="accent1">
+                <a:shade val="15000"/>
+              </a:schemeClr>
+            </a:lnRef>
+            <a:fillRef idx="1">
+              <a:schemeClr val="accent1"/>
+            </a:fillRef>
+            <a:effectRef idx="0">
+              <a:schemeClr val="accent1"/>
+            </a:effectRef>
+            <a:fontRef idx="minor">
+              <a:schemeClr val="lt1"/>
+            </a:fontRef>
+          </p:style>
+          <p:txBody>
+            <a:bodyPr rtlCol="0" anchor="ctr"/>
+            <a:lstStyle/>
+            <a:p>
+              <a:pPr algn="ctr"/>
+              <a:endParaRPr lang="en-GB"/>
+            </a:p>
+          </p:txBody>
+        </p:sp>
+      </p:grpSp>
+      <p:grpSp>
+        <p:nvGrpSpPr>
+          <p:cNvPr id="36" name="Group 35">
+            <a:extLst>
+              <a:ext uri="{FF2B5EF4-FFF2-40B4-BE49-F238E27FC236}">
+                <a16:creationId xmlns:a16="http://schemas.microsoft.com/office/drawing/2014/main" id="{8E9FF5E7-31F3-D71A-3C1B-1DF45F5ECE56}"/>
+              </a:ext>
+            </a:extLst>
+          </p:cNvPr>
+          <p:cNvGrpSpPr/>
+          <p:nvPr/>
+        </p:nvGrpSpPr>
+        <p:grpSpPr>
+          <a:xfrm>
+            <a:off x="3165029" y="5784841"/>
+            <a:ext cx="631130" cy="631130"/>
+            <a:chOff x="3419133" y="5824353"/>
+            <a:chExt cx="631130" cy="631130"/>
+          </a:xfrm>
+        </p:grpSpPr>
+        <p:sp>
+          <p:nvSpPr>
+            <p:cNvPr id="38" name="Diamond 37">
+              <a:extLst>
+                <a:ext uri="{FF2B5EF4-FFF2-40B4-BE49-F238E27FC236}">
+                  <a16:creationId xmlns:a16="http://schemas.microsoft.com/office/drawing/2014/main" id="{707294B8-180B-6ED2-4B69-4D852C050140}"/>
+                </a:ext>
+              </a:extLst>
+            </p:cNvPr>
+            <p:cNvSpPr/>
+            <p:nvPr/>
+          </p:nvSpPr>
+          <p:spPr>
+            <a:xfrm>
+              <a:off x="3419133" y="5824353"/>
+              <a:ext cx="631130" cy="631130"/>
+            </a:xfrm>
+            <a:prstGeom prst="diamond">
+              <a:avLst/>
+            </a:prstGeom>
+            <a:solidFill>
+              <a:srgbClr val="FF77A8"/>
+            </a:solidFill>
+            <a:ln w="57150">
+              <a:solidFill>
+                <a:schemeClr val="tx1"/>
+              </a:solidFill>
+            </a:ln>
+          </p:spPr>
+          <p:style>
+            <a:lnRef idx="2">
+              <a:schemeClr val="accent1">
+                <a:shade val="15000"/>
+              </a:schemeClr>
+            </a:lnRef>
+            <a:fillRef idx="1">
+              <a:schemeClr val="accent1"/>
+            </a:fillRef>
+            <a:effectRef idx="0">
+              <a:schemeClr val="accent1"/>
+            </a:effectRef>
+            <a:fontRef idx="minor">
+              <a:schemeClr val="lt1"/>
+            </a:fontRef>
+          </p:style>
+          <p:txBody>
+            <a:bodyPr rtlCol="0" anchor="ctr"/>
+            <a:lstStyle/>
+            <a:p>
+              <a:pPr algn="ctr"/>
+              <a:endParaRPr lang="en-GB" dirty="0"/>
+            </a:p>
+          </p:txBody>
+        </p:sp>
+        <p:sp>
+          <p:nvSpPr>
+            <p:cNvPr id="43" name="Oval 42">
+              <a:extLst>
+                <a:ext uri="{FF2B5EF4-FFF2-40B4-BE49-F238E27FC236}">
+                  <a16:creationId xmlns:a16="http://schemas.microsoft.com/office/drawing/2014/main" id="{A0BC3C82-AD04-6EDB-D005-EE0E9530DFCE}"/>
+                </a:ext>
+              </a:extLst>
+            </p:cNvPr>
+            <p:cNvSpPr/>
+            <p:nvPr/>
+          </p:nvSpPr>
+          <p:spPr>
+            <a:xfrm>
+              <a:off x="3659609" y="6010203"/>
+              <a:ext cx="224121" cy="220757"/>
+            </a:xfrm>
+            <a:prstGeom prst="ellipse">
+              <a:avLst/>
+            </a:prstGeom>
+            <a:solidFill>
+              <a:srgbClr val="FF77A8"/>
+            </a:solidFill>
+            <a:ln w="57150">
+              <a:solidFill>
+                <a:schemeClr val="tx1"/>
+              </a:solidFill>
+            </a:ln>
+          </p:spPr>
+          <p:style>
+            <a:lnRef idx="2">
+              <a:schemeClr val="accent1">
+                <a:shade val="15000"/>
+              </a:schemeClr>
+            </a:lnRef>
+            <a:fillRef idx="1">
+              <a:schemeClr val="accent1"/>
+            </a:fillRef>
+            <a:effectRef idx="0">
+              <a:schemeClr val="accent1"/>
+            </a:effectRef>
+            <a:fontRef idx="minor">
+              <a:schemeClr val="lt1"/>
+            </a:fontRef>
+          </p:style>
+          <p:txBody>
+            <a:bodyPr rtlCol="0" anchor="ctr"/>
+            <a:lstStyle/>
+            <a:p>
+              <a:pPr algn="ctr"/>
+              <a:endParaRPr lang="en-GB" dirty="0"/>
+            </a:p>
+          </p:txBody>
+        </p:sp>
+        <p:sp>
+          <p:nvSpPr>
+            <p:cNvPr id="39" name="Oval 38">
+              <a:extLst>
+                <a:ext uri="{FF2B5EF4-FFF2-40B4-BE49-F238E27FC236}">
+                  <a16:creationId xmlns:a16="http://schemas.microsoft.com/office/drawing/2014/main" id="{F966ABDD-4FE3-840D-37BC-D75A8E92E174}"/>
+                </a:ext>
+              </a:extLst>
+            </p:cNvPr>
+            <p:cNvSpPr/>
+            <p:nvPr/>
+          </p:nvSpPr>
+          <p:spPr>
+            <a:xfrm>
+              <a:off x="3586742" y="6098445"/>
+              <a:ext cx="127102" cy="125194"/>
+            </a:xfrm>
+            <a:prstGeom prst="ellipse">
+              <a:avLst/>
+            </a:prstGeom>
+            <a:solidFill>
+              <a:srgbClr val="FF77A8"/>
+            </a:solidFill>
+            <a:ln w="57150">
+              <a:solidFill>
+                <a:schemeClr val="tx1"/>
+              </a:solidFill>
+            </a:ln>
+          </p:spPr>
+          <p:style>
+            <a:lnRef idx="2">
+              <a:schemeClr val="accent1">
+                <a:shade val="15000"/>
+              </a:schemeClr>
+            </a:lnRef>
+            <a:fillRef idx="1">
+              <a:schemeClr val="accent1"/>
+            </a:fillRef>
+            <a:effectRef idx="0">
+              <a:schemeClr val="accent1"/>
+            </a:effectRef>
+            <a:fontRef idx="minor">
+              <a:schemeClr val="lt1"/>
+            </a:fontRef>
+          </p:style>
+          <p:txBody>
+            <a:bodyPr rtlCol="0" anchor="ctr"/>
+            <a:lstStyle/>
+            <a:p>
+              <a:pPr algn="ctr"/>
+              <a:endParaRPr lang="en-GB" dirty="0"/>
+            </a:p>
+          </p:txBody>
+        </p:sp>
+      </p:grpSp>
+      <p:grpSp>
+        <p:nvGrpSpPr>
+          <p:cNvPr id="46" name="Group 45">
+            <a:extLst>
+              <a:ext uri="{FF2B5EF4-FFF2-40B4-BE49-F238E27FC236}">
+                <a16:creationId xmlns:a16="http://schemas.microsoft.com/office/drawing/2014/main" id="{541602B6-8EF8-4BCD-E43D-64C996CF2EA7}"/>
+              </a:ext>
+            </a:extLst>
+          </p:cNvPr>
+          <p:cNvGrpSpPr/>
+          <p:nvPr/>
+        </p:nvGrpSpPr>
+        <p:grpSpPr>
+          <a:xfrm>
+            <a:off x="3926176" y="5783148"/>
+            <a:ext cx="631130" cy="631130"/>
+            <a:chOff x="3419133" y="5824353"/>
+            <a:chExt cx="631130" cy="631130"/>
+          </a:xfrm>
+          <a:solidFill>
+            <a:srgbClr val="7E2553"/>
+          </a:solidFill>
+        </p:grpSpPr>
+        <p:sp>
+          <p:nvSpPr>
+            <p:cNvPr id="51" name="Diamond 50">
+              <a:extLst>
+                <a:ext uri="{FF2B5EF4-FFF2-40B4-BE49-F238E27FC236}">
+                  <a16:creationId xmlns:a16="http://schemas.microsoft.com/office/drawing/2014/main" id="{24FB3D85-612E-D4B3-30BE-B9D6BE0A9D25}"/>
+                </a:ext>
+              </a:extLst>
+            </p:cNvPr>
+            <p:cNvSpPr/>
+            <p:nvPr/>
+          </p:nvSpPr>
+          <p:spPr>
+            <a:xfrm>
+              <a:off x="3419133" y="5824353"/>
+              <a:ext cx="631130" cy="631130"/>
+            </a:xfrm>
+            <a:prstGeom prst="diamond">
+              <a:avLst/>
+            </a:prstGeom>
+            <a:grpFill/>
+            <a:ln w="57150">
+              <a:solidFill>
+                <a:schemeClr val="tx1"/>
+              </a:solidFill>
+            </a:ln>
+          </p:spPr>
+          <p:style>
+            <a:lnRef idx="2">
+              <a:schemeClr val="accent1">
+                <a:shade val="15000"/>
+              </a:schemeClr>
+            </a:lnRef>
+            <a:fillRef idx="1">
+              <a:schemeClr val="accent1"/>
+            </a:fillRef>
+            <a:effectRef idx="0">
+              <a:schemeClr val="accent1"/>
+            </a:effectRef>
+            <a:fontRef idx="minor">
+              <a:schemeClr val="lt1"/>
+            </a:fontRef>
+          </p:style>
+          <p:txBody>
+            <a:bodyPr rtlCol="0" anchor="ctr"/>
+            <a:lstStyle/>
+            <a:p>
+              <a:pPr algn="ctr"/>
+              <a:endParaRPr lang="en-GB" dirty="0"/>
+            </a:p>
+          </p:txBody>
+        </p:sp>
+        <p:sp>
+          <p:nvSpPr>
+            <p:cNvPr id="55" name="Oval 54">
+              <a:extLst>
+                <a:ext uri="{FF2B5EF4-FFF2-40B4-BE49-F238E27FC236}">
+                  <a16:creationId xmlns:a16="http://schemas.microsoft.com/office/drawing/2014/main" id="{80039DF3-7D79-AF79-C9F5-4B287892A3CF}"/>
+                </a:ext>
+              </a:extLst>
+            </p:cNvPr>
+            <p:cNvSpPr/>
+            <p:nvPr/>
+          </p:nvSpPr>
+          <p:spPr>
+            <a:xfrm>
+              <a:off x="3586742" y="6098445"/>
+              <a:ext cx="127102" cy="125194"/>
+            </a:xfrm>
+            <a:prstGeom prst="ellipse">
+              <a:avLst/>
+            </a:prstGeom>
+            <a:grpFill/>
+            <a:ln w="57150">
+              <a:solidFill>
+                <a:schemeClr val="tx1"/>
+              </a:solidFill>
+            </a:ln>
+          </p:spPr>
+          <p:style>
+            <a:lnRef idx="2">
+              <a:schemeClr val="accent1">
+                <a:shade val="15000"/>
+              </a:schemeClr>
+            </a:lnRef>
+            <a:fillRef idx="1">
+              <a:schemeClr val="accent1"/>
+            </a:fillRef>
+            <a:effectRef idx="0">
+              <a:schemeClr val="accent1"/>
+            </a:effectRef>
+            <a:fontRef idx="minor">
+              <a:schemeClr val="lt1"/>
+            </a:fontRef>
+          </p:style>
+          <p:txBody>
+            <a:bodyPr rtlCol="0" anchor="ctr"/>
+            <a:lstStyle/>
+            <a:p>
+              <a:pPr algn="ctr"/>
+              <a:endParaRPr lang="en-GB" dirty="0"/>
+            </a:p>
+          </p:txBody>
+        </p:sp>
+        <p:sp>
+          <p:nvSpPr>
+            <p:cNvPr id="52" name="Oval 51">
+              <a:extLst>
+                <a:ext uri="{FF2B5EF4-FFF2-40B4-BE49-F238E27FC236}">
+                  <a16:creationId xmlns:a16="http://schemas.microsoft.com/office/drawing/2014/main" id="{BFC32B48-F15E-91BD-5A5F-27ED469690FC}"/>
+                </a:ext>
+              </a:extLst>
+            </p:cNvPr>
+            <p:cNvSpPr/>
+            <p:nvPr/>
+          </p:nvSpPr>
+          <p:spPr>
+            <a:xfrm>
+              <a:off x="3659609" y="6010203"/>
+              <a:ext cx="224121" cy="220757"/>
+            </a:xfrm>
+            <a:prstGeom prst="ellipse">
+              <a:avLst/>
+            </a:prstGeom>
+            <a:grpFill/>
+            <a:ln w="57150">
+              <a:solidFill>
+                <a:schemeClr val="tx1"/>
+              </a:solidFill>
+            </a:ln>
+          </p:spPr>
+          <p:style>
+            <a:lnRef idx="2">
+              <a:schemeClr val="accent1">
+                <a:shade val="15000"/>
+              </a:schemeClr>
+            </a:lnRef>
+            <a:fillRef idx="1">
+              <a:schemeClr val="accent1"/>
+            </a:fillRef>
+            <a:effectRef idx="0">
+              <a:schemeClr val="accent1"/>
+            </a:effectRef>
+            <a:fontRef idx="minor">
+              <a:schemeClr val="lt1"/>
+            </a:fontRef>
+          </p:style>
+          <p:txBody>
+            <a:bodyPr rtlCol="0" anchor="ctr"/>
+            <a:lstStyle/>
+            <a:p>
+              <a:pPr algn="ctr"/>
+              <a:endParaRPr lang="en-GB" dirty="0"/>
+            </a:p>
+          </p:txBody>
+        </p:sp>
+      </p:grpSp>
+      <p:sp>
+        <p:nvSpPr>
+          <p:cNvPr id="57" name="Rectangle: Rounded Corners 56">
+            <a:extLst>
+              <a:ext uri="{FF2B5EF4-FFF2-40B4-BE49-F238E27FC236}">
+                <a16:creationId xmlns:a16="http://schemas.microsoft.com/office/drawing/2014/main" id="{2F4CDCE5-77BA-28DF-A1FD-1AA5950CE294}"/>
+              </a:ext>
+            </a:extLst>
+          </p:cNvPr>
+          <p:cNvSpPr/>
+          <p:nvPr/>
+        </p:nvSpPr>
+        <p:spPr>
+          <a:xfrm>
+            <a:off x="3639616" y="1020174"/>
+            <a:ext cx="313086" cy="1183263"/>
+          </a:xfrm>
+          <a:prstGeom prst="roundRect">
+            <a:avLst/>
+          </a:prstGeom>
+          <a:solidFill>
+            <a:srgbClr val="1D2B53"/>
+          </a:solidFill>
+          <a:ln w="57150">
+            <a:solidFill>
+              <a:schemeClr val="tx1"/>
+            </a:solidFill>
+          </a:ln>
+        </p:spPr>
+        <p:style>
+          <a:lnRef idx="2">
+            <a:schemeClr val="accent1">
+              <a:shade val="15000"/>
+            </a:schemeClr>
+          </a:lnRef>
+          <a:fillRef idx="1">
+            <a:schemeClr val="accent1"/>
+          </a:fillRef>
+          <a:effectRef idx="0">
+            <a:schemeClr val="accent1"/>
+          </a:effectRef>
+          <a:fontRef idx="minor">
+            <a:schemeClr val="lt1"/>
+          </a:fontRef>
+        </p:style>
+        <p:txBody>
+          <a:bodyPr rtlCol="0" anchor="ctr"/>
+          <a:lstStyle/>
+          <a:p>
+            <a:pPr algn="ctr"/>
+            <a:endParaRPr lang="en-GB"/>
+          </a:p>
+        </p:txBody>
+      </p:sp>
+      <p:grpSp>
+        <p:nvGrpSpPr>
+          <p:cNvPr id="7" name="Group 6">
+            <a:extLst>
+              <a:ext uri="{FF2B5EF4-FFF2-40B4-BE49-F238E27FC236}">
+                <a16:creationId xmlns:a16="http://schemas.microsoft.com/office/drawing/2014/main" id="{F6943739-60E4-CFAE-FCCC-977DE67992A4}"/>
+              </a:ext>
+            </a:extLst>
+          </p:cNvPr>
+          <p:cNvGrpSpPr/>
+          <p:nvPr/>
+        </p:nvGrpSpPr>
+        <p:grpSpPr>
+          <a:xfrm>
+            <a:off x="3805674" y="4876248"/>
+            <a:ext cx="511276" cy="563793"/>
+            <a:chOff x="3443749" y="1809752"/>
+            <a:chExt cx="511276" cy="563793"/>
+          </a:xfrm>
+        </p:grpSpPr>
+        <p:sp>
+          <p:nvSpPr>
+            <p:cNvPr id="4" name="Oval 3">
+              <a:extLst>
+                <a:ext uri="{FF2B5EF4-FFF2-40B4-BE49-F238E27FC236}">
+                  <a16:creationId xmlns:a16="http://schemas.microsoft.com/office/drawing/2014/main" id="{6FBC9C08-D5E6-6DEF-AF6E-6B3103B1D672}"/>
+                </a:ext>
+              </a:extLst>
+            </p:cNvPr>
+            <p:cNvSpPr/>
+            <p:nvPr/>
+          </p:nvSpPr>
+          <p:spPr>
+            <a:xfrm>
+              <a:off x="3443749" y="1809752"/>
+              <a:ext cx="511276" cy="511276"/>
+            </a:xfrm>
+            <a:prstGeom prst="ellipse">
+              <a:avLst/>
+            </a:prstGeom>
+            <a:solidFill>
+              <a:srgbClr val="FFF1E8"/>
+            </a:solidFill>
+            <a:ln w="57150">
+              <a:solidFill>
+                <a:schemeClr val="tx1"/>
+              </a:solidFill>
+            </a:ln>
+          </p:spPr>
+          <p:style>
+            <a:lnRef idx="2">
+              <a:schemeClr val="accent1">
+                <a:shade val="15000"/>
+              </a:schemeClr>
+            </a:lnRef>
+            <a:fillRef idx="1">
+              <a:schemeClr val="accent1"/>
+            </a:fillRef>
+            <a:effectRef idx="0">
+              <a:schemeClr val="accent1"/>
+            </a:effectRef>
+            <a:fontRef idx="minor">
+              <a:schemeClr val="lt1"/>
+            </a:fontRef>
+          </p:style>
+          <p:txBody>
+            <a:bodyPr rtlCol="0" anchor="ctr"/>
+            <a:lstStyle/>
+            <a:p>
+              <a:pPr algn="ctr"/>
+              <a:endParaRPr lang="en-GB"/>
+            </a:p>
+          </p:txBody>
+        </p:sp>
+        <p:sp>
+          <p:nvSpPr>
+            <p:cNvPr id="5" name="Moon 4">
+              <a:extLst>
+                <a:ext uri="{FF2B5EF4-FFF2-40B4-BE49-F238E27FC236}">
+                  <a16:creationId xmlns:a16="http://schemas.microsoft.com/office/drawing/2014/main" id="{C84A9A74-02FC-76A6-A629-6CDD721F5C39}"/>
+                </a:ext>
+              </a:extLst>
+            </p:cNvPr>
+            <p:cNvSpPr/>
+            <p:nvPr/>
+          </p:nvSpPr>
+          <p:spPr>
+            <a:xfrm rot="18900000">
+              <a:off x="3494655" y="1906513"/>
+              <a:ext cx="256022" cy="467032"/>
+            </a:xfrm>
+            <a:prstGeom prst="moon">
+              <a:avLst>
+                <a:gd name="adj" fmla="val 28954"/>
+              </a:avLst>
+            </a:prstGeom>
+            <a:solidFill>
+              <a:srgbClr val="FFCCAA"/>
+            </a:solidFill>
+            <a:ln>
+              <a:noFill/>
+            </a:ln>
+          </p:spPr>
+          <p:style>
+            <a:lnRef idx="2">
+              <a:schemeClr val="accent1">
+                <a:shade val="15000"/>
+              </a:schemeClr>
+            </a:lnRef>
+            <a:fillRef idx="1">
+              <a:schemeClr val="accent1"/>
+            </a:fillRef>
+            <a:effectRef idx="0">
+              <a:schemeClr val="accent1"/>
+            </a:effectRef>
+            <a:fontRef idx="minor">
+              <a:schemeClr val="lt1"/>
+            </a:fontRef>
+          </p:style>
+          <p:txBody>
+            <a:bodyPr rtlCol="0" anchor="ctr"/>
+            <a:lstStyle/>
+            <a:p>
+              <a:pPr algn="ctr"/>
+              <a:endParaRPr lang="en-GB"/>
+            </a:p>
+          </p:txBody>
+        </p:sp>
+        <p:sp>
+          <p:nvSpPr>
+            <p:cNvPr id="6" name="Oval 5">
+              <a:extLst>
+                <a:ext uri="{FF2B5EF4-FFF2-40B4-BE49-F238E27FC236}">
+                  <a16:creationId xmlns:a16="http://schemas.microsoft.com/office/drawing/2014/main" id="{6C1619BA-5E61-CDAB-694A-251246482473}"/>
+                </a:ext>
+              </a:extLst>
+            </p:cNvPr>
+            <p:cNvSpPr/>
+            <p:nvPr/>
+          </p:nvSpPr>
+          <p:spPr>
+            <a:xfrm>
+              <a:off x="3443749" y="1809752"/>
+              <a:ext cx="511276" cy="511276"/>
+            </a:xfrm>
+            <a:prstGeom prst="ellipse">
+              <a:avLst/>
+            </a:prstGeom>
+            <a:noFill/>
+            <a:ln w="57150">
+              <a:solidFill>
+                <a:schemeClr val="tx1"/>
+              </a:solidFill>
+            </a:ln>
+          </p:spPr>
+          <p:style>
+            <a:lnRef idx="2">
+              <a:schemeClr val="accent1">
+                <a:shade val="15000"/>
+              </a:schemeClr>
+            </a:lnRef>
+            <a:fillRef idx="1">
+              <a:schemeClr val="accent1"/>
+            </a:fillRef>
+            <a:effectRef idx="0">
+              <a:schemeClr val="accent1"/>
+            </a:effectRef>
+            <a:fontRef idx="minor">
+              <a:schemeClr val="lt1"/>
+            </a:fontRef>
+          </p:style>
+          <p:txBody>
+            <a:bodyPr rtlCol="0" anchor="ctr"/>
+            <a:lstStyle/>
+            <a:p>
+              <a:pPr algn="ctr"/>
+              <a:endParaRPr lang="en-GB" dirty="0"/>
+            </a:p>
+          </p:txBody>
+        </p:sp>
+      </p:grpSp>
     </p:spTree>
     <p:extLst>
       <p:ext uri="{BB962C8B-B14F-4D97-AF65-F5344CB8AC3E}">
@@ -6358,10 +7069,388 @@
           </p:sp>
         </p:grpSp>
       </p:grpSp>
+      <p:grpSp>
+        <p:nvGrpSpPr>
+          <p:cNvPr id="2" name="Group 1">
+            <a:extLst>
+              <a:ext uri="{FF2B5EF4-FFF2-40B4-BE49-F238E27FC236}">
+                <a16:creationId xmlns:a16="http://schemas.microsoft.com/office/drawing/2014/main" id="{01577808-FBC9-66DD-54D3-7A878A885705}"/>
+              </a:ext>
+            </a:extLst>
+          </p:cNvPr>
+          <p:cNvGrpSpPr/>
+          <p:nvPr/>
+        </p:nvGrpSpPr>
+        <p:grpSpPr>
+          <a:xfrm>
+            <a:off x="3509235" y="2246627"/>
+            <a:ext cx="1140879" cy="1142998"/>
+            <a:chOff x="1651821" y="2116934"/>
+            <a:chExt cx="1375408" cy="1377962"/>
+          </a:xfrm>
+        </p:grpSpPr>
+        <p:sp>
+          <p:nvSpPr>
+            <p:cNvPr id="3" name="Rectangle: Rounded Corners 2">
+              <a:extLst>
+                <a:ext uri="{FF2B5EF4-FFF2-40B4-BE49-F238E27FC236}">
+                  <a16:creationId xmlns:a16="http://schemas.microsoft.com/office/drawing/2014/main" id="{C934E963-786E-FD89-413C-1C85D6C1E453}"/>
+                </a:ext>
+              </a:extLst>
+            </p:cNvPr>
+            <p:cNvSpPr/>
+            <p:nvPr/>
+          </p:nvSpPr>
+          <p:spPr>
+            <a:xfrm>
+              <a:off x="1651821" y="2116934"/>
+              <a:ext cx="1375408" cy="1375408"/>
+            </a:xfrm>
+            <a:prstGeom prst="roundRect">
+              <a:avLst>
+                <a:gd name="adj" fmla="val 11404"/>
+              </a:avLst>
+            </a:prstGeom>
+            <a:solidFill>
+              <a:srgbClr val="FFEC27"/>
+            </a:solidFill>
+            <a:ln w="57150">
+              <a:solidFill>
+                <a:schemeClr val="tx1"/>
+              </a:solidFill>
+            </a:ln>
+          </p:spPr>
+          <p:style>
+            <a:lnRef idx="2">
+              <a:schemeClr val="accent1">
+                <a:shade val="15000"/>
+              </a:schemeClr>
+            </a:lnRef>
+            <a:fillRef idx="1">
+              <a:schemeClr val="accent1"/>
+            </a:fillRef>
+            <a:effectRef idx="0">
+              <a:schemeClr val="accent1"/>
+            </a:effectRef>
+            <a:fontRef idx="minor">
+              <a:schemeClr val="lt1"/>
+            </a:fontRef>
+          </p:style>
+          <p:txBody>
+            <a:bodyPr rtlCol="0" anchor="ctr"/>
+            <a:lstStyle/>
+            <a:p>
+              <a:pPr algn="ctr"/>
+              <a:endParaRPr lang="en-GB"/>
+            </a:p>
+          </p:txBody>
+        </p:sp>
+        <p:sp>
+          <p:nvSpPr>
+            <p:cNvPr id="6" name="Rectangle 5">
+              <a:extLst>
+                <a:ext uri="{FF2B5EF4-FFF2-40B4-BE49-F238E27FC236}">
+                  <a16:creationId xmlns:a16="http://schemas.microsoft.com/office/drawing/2014/main" id="{9778D559-5875-5A06-51FC-B72E37A48528}"/>
+                </a:ext>
+              </a:extLst>
+            </p:cNvPr>
+            <p:cNvSpPr/>
+            <p:nvPr/>
+          </p:nvSpPr>
+          <p:spPr>
+            <a:xfrm>
+              <a:off x="1673394" y="3205627"/>
+              <a:ext cx="1332263" cy="194548"/>
+            </a:xfrm>
+            <a:prstGeom prst="rect">
+              <a:avLst/>
+            </a:prstGeom>
+            <a:solidFill>
+              <a:srgbClr val="FFA300"/>
+            </a:solidFill>
+            <a:ln>
+              <a:noFill/>
+            </a:ln>
+          </p:spPr>
+          <p:style>
+            <a:lnRef idx="2">
+              <a:schemeClr val="accent1">
+                <a:shade val="15000"/>
+              </a:schemeClr>
+            </a:lnRef>
+            <a:fillRef idx="1">
+              <a:schemeClr val="accent1"/>
+            </a:fillRef>
+            <a:effectRef idx="0">
+              <a:schemeClr val="accent1"/>
+            </a:effectRef>
+            <a:fontRef idx="minor">
+              <a:schemeClr val="lt1"/>
+            </a:fontRef>
+          </p:style>
+          <p:txBody>
+            <a:bodyPr rtlCol="0" anchor="ctr"/>
+            <a:lstStyle/>
+            <a:p>
+              <a:pPr algn="ctr"/>
+              <a:endParaRPr lang="en-GB"/>
+            </a:p>
+          </p:txBody>
+        </p:sp>
+        <p:sp>
+          <p:nvSpPr>
+            <p:cNvPr id="7" name="Rectangle 6">
+              <a:extLst>
+                <a:ext uri="{FF2B5EF4-FFF2-40B4-BE49-F238E27FC236}">
+                  <a16:creationId xmlns:a16="http://schemas.microsoft.com/office/drawing/2014/main" id="{62F293D2-99AD-2EBF-6F94-06189C3EB39B}"/>
+                </a:ext>
+              </a:extLst>
+            </p:cNvPr>
+            <p:cNvSpPr/>
+            <p:nvPr/>
+          </p:nvSpPr>
+          <p:spPr>
+            <a:xfrm>
+              <a:off x="1694966" y="3362685"/>
+              <a:ext cx="1292103" cy="97274"/>
+            </a:xfrm>
+            <a:prstGeom prst="rect">
+              <a:avLst/>
+            </a:prstGeom>
+            <a:solidFill>
+              <a:srgbClr val="FFA300"/>
+            </a:solidFill>
+            <a:ln>
+              <a:noFill/>
+            </a:ln>
+          </p:spPr>
+          <p:style>
+            <a:lnRef idx="2">
+              <a:schemeClr val="accent1">
+                <a:shade val="15000"/>
+              </a:schemeClr>
+            </a:lnRef>
+            <a:fillRef idx="1">
+              <a:schemeClr val="accent1"/>
+            </a:fillRef>
+            <a:effectRef idx="0">
+              <a:schemeClr val="accent1"/>
+            </a:effectRef>
+            <a:fontRef idx="minor">
+              <a:schemeClr val="lt1"/>
+            </a:fontRef>
+          </p:style>
+          <p:txBody>
+            <a:bodyPr rtlCol="0" anchor="ctr"/>
+            <a:lstStyle/>
+            <a:p>
+              <a:pPr algn="ctr"/>
+              <a:endParaRPr lang="en-GB"/>
+            </a:p>
+          </p:txBody>
+        </p:sp>
+        <p:sp>
+          <p:nvSpPr>
+            <p:cNvPr id="8" name="Rectangle 7">
+              <a:extLst>
+                <a:ext uri="{FF2B5EF4-FFF2-40B4-BE49-F238E27FC236}">
+                  <a16:creationId xmlns:a16="http://schemas.microsoft.com/office/drawing/2014/main" id="{CD6C8A81-7EBD-E7F6-A09E-23579A8E9CA9}"/>
+                </a:ext>
+              </a:extLst>
+            </p:cNvPr>
+            <p:cNvSpPr/>
+            <p:nvPr/>
+          </p:nvSpPr>
+          <p:spPr>
+            <a:xfrm>
+              <a:off x="1773487" y="3397622"/>
+              <a:ext cx="1173100" cy="97274"/>
+            </a:xfrm>
+            <a:prstGeom prst="rect">
+              <a:avLst/>
+            </a:prstGeom>
+            <a:solidFill>
+              <a:srgbClr val="FFA300"/>
+            </a:solidFill>
+            <a:ln>
+              <a:noFill/>
+            </a:ln>
+          </p:spPr>
+          <p:style>
+            <a:lnRef idx="2">
+              <a:schemeClr val="accent1">
+                <a:shade val="15000"/>
+              </a:schemeClr>
+            </a:lnRef>
+            <a:fillRef idx="1">
+              <a:schemeClr val="accent1"/>
+            </a:fillRef>
+            <a:effectRef idx="0">
+              <a:schemeClr val="accent1"/>
+            </a:effectRef>
+            <a:fontRef idx="minor">
+              <a:schemeClr val="lt1"/>
+            </a:fontRef>
+          </p:style>
+          <p:txBody>
+            <a:bodyPr rtlCol="0" anchor="ctr"/>
+            <a:lstStyle/>
+            <a:p>
+              <a:pPr algn="ctr"/>
+              <a:endParaRPr lang="en-GB"/>
+            </a:p>
+          </p:txBody>
+        </p:sp>
+        <p:sp>
+          <p:nvSpPr>
+            <p:cNvPr id="9" name="Rectangle: Rounded Corners 8">
+              <a:extLst>
+                <a:ext uri="{FF2B5EF4-FFF2-40B4-BE49-F238E27FC236}">
+                  <a16:creationId xmlns:a16="http://schemas.microsoft.com/office/drawing/2014/main" id="{A6276409-8333-0D8F-9619-3A03B71D1021}"/>
+                </a:ext>
+              </a:extLst>
+            </p:cNvPr>
+            <p:cNvSpPr/>
+            <p:nvPr/>
+          </p:nvSpPr>
+          <p:spPr>
+            <a:xfrm>
+              <a:off x="1651821" y="2116934"/>
+              <a:ext cx="1375408" cy="1375408"/>
+            </a:xfrm>
+            <a:prstGeom prst="roundRect">
+              <a:avLst>
+                <a:gd name="adj" fmla="val 11404"/>
+              </a:avLst>
+            </a:prstGeom>
+            <a:noFill/>
+            <a:ln w="57150">
+              <a:solidFill>
+                <a:schemeClr val="tx1"/>
+              </a:solidFill>
+            </a:ln>
+          </p:spPr>
+          <p:style>
+            <a:lnRef idx="2">
+              <a:schemeClr val="accent1">
+                <a:shade val="15000"/>
+              </a:schemeClr>
+            </a:lnRef>
+            <a:fillRef idx="1">
+              <a:schemeClr val="accent1"/>
+            </a:fillRef>
+            <a:effectRef idx="0">
+              <a:schemeClr val="accent1"/>
+            </a:effectRef>
+            <a:fontRef idx="minor">
+              <a:schemeClr val="lt1"/>
+            </a:fontRef>
+          </p:style>
+          <p:txBody>
+            <a:bodyPr rtlCol="0" anchor="ctr"/>
+            <a:lstStyle/>
+            <a:p>
+              <a:pPr algn="ctr"/>
+              <a:endParaRPr lang="en-GB"/>
+            </a:p>
+          </p:txBody>
+        </p:sp>
+      </p:grpSp>
     </p:spTree>
     <p:extLst>
       <p:ext uri="{BB962C8B-B14F-4D97-AF65-F5344CB8AC3E}">
         <p14:creationId xmlns:p14="http://schemas.microsoft.com/office/powerpoint/2010/main" val="1649178389"/>
+      </p:ext>
+    </p:extLst>
+  </p:cSld>
+  <p:clrMapOvr>
+    <a:masterClrMapping/>
+  </p:clrMapOvr>
+</p:sld>
+</file>
+
+<file path=ppt/slides/slide3.xml><?xml version="1.0" encoding="utf-8"?>
+<p:sld xmlns:a="http://schemas.openxmlformats.org/drawingml/2006/main" xmlns:r="http://schemas.openxmlformats.org/officeDocument/2006/relationships" xmlns:p="http://schemas.openxmlformats.org/presentationml/2006/main">
+  <p:cSld>
+    <p:spTree>
+      <p:nvGrpSpPr>
+        <p:cNvPr id="1" name=""/>
+        <p:cNvGrpSpPr/>
+        <p:nvPr/>
+      </p:nvGrpSpPr>
+      <p:grpSpPr>
+        <a:xfrm>
+          <a:off x="0" y="0"/>
+          <a:ext cx="0" cy="0"/>
+          <a:chOff x="0" y="0"/>
+          <a:chExt cx="0" cy="0"/>
+        </a:xfrm>
+      </p:grpSpPr>
+      <p:pic>
+        <p:nvPicPr>
+          <p:cNvPr id="5" name="Picture 4">
+            <a:extLst>
+              <a:ext uri="{FF2B5EF4-FFF2-40B4-BE49-F238E27FC236}">
+                <a16:creationId xmlns:a16="http://schemas.microsoft.com/office/drawing/2014/main" id="{2D7F88CE-01D7-366A-B945-7AE846B5E13D}"/>
+              </a:ext>
+            </a:extLst>
+          </p:cNvPr>
+          <p:cNvPicPr>
+            <a:picLocks noChangeAspect="1"/>
+          </p:cNvPicPr>
+          <p:nvPr/>
+        </p:nvPicPr>
+        <p:blipFill>
+          <a:blip r:embed="rId2"/>
+          <a:srcRect l="17001" t="30000" r="63000" b="27111"/>
+          <a:stretch>
+            <a:fillRect/>
+          </a:stretch>
+        </p:blipFill>
+        <p:spPr>
+          <a:xfrm>
+            <a:off x="2072640" y="2743201"/>
+            <a:ext cx="2438400" cy="1470660"/>
+          </a:xfrm>
+          <a:prstGeom prst="rect">
+            <a:avLst/>
+          </a:prstGeom>
+        </p:spPr>
+      </p:pic>
+      <p:pic>
+        <p:nvPicPr>
+          <p:cNvPr id="7" name="Picture 6">
+            <a:extLst>
+              <a:ext uri="{FF2B5EF4-FFF2-40B4-BE49-F238E27FC236}">
+                <a16:creationId xmlns:a16="http://schemas.microsoft.com/office/drawing/2014/main" id="{8F30E398-8BE8-BD1C-4DB1-3A40A22B57A1}"/>
+              </a:ext>
+            </a:extLst>
+          </p:cNvPr>
+          <p:cNvPicPr>
+            <a:picLocks noChangeAspect="1"/>
+          </p:cNvPicPr>
+          <p:nvPr/>
+        </p:nvPicPr>
+        <p:blipFill>
+          <a:blip r:embed="rId3"/>
+          <a:stretch>
+            <a:fillRect/>
+          </a:stretch>
+        </p:blipFill>
+        <p:spPr>
+          <a:xfrm>
+            <a:off x="0" y="1714500"/>
+            <a:ext cx="12192000" cy="3429000"/>
+          </a:xfrm>
+          <a:prstGeom prst="rect">
+            <a:avLst/>
+          </a:prstGeom>
+        </p:spPr>
+      </p:pic>
+    </p:spTree>
+    <p:extLst>
+      <p:ext uri="{BB962C8B-B14F-4D97-AF65-F5344CB8AC3E}">
+        <p14:creationId xmlns:p14="http://schemas.microsoft.com/office/powerpoint/2010/main" val="2513464955"/>
       </p:ext>
     </p:extLst>
   </p:cSld>
